--- a/pptx-output/01-beginner-copilot-agent-best-practices.pptx
+++ b/pptx-output/01-beginner-copilot-agent-best-practices.pptx
@@ -23,7 +23,6 @@
     <p:sldId id="271" r:id="rId23"/>
     <p:sldId id="272" r:id="rId24"/>
     <p:sldId id="273" r:id="rId25"/>
-    <p:sldId id="274" r:id="rId26"/>
   </p:sldIdLst>
   <p:sldSz cx="12191695" cy="6858000" type="screen4x3"/>
   <p:notesSz cx="6858000" cy="9144000"/>
@@ -518,16 +517,7 @@
         <p:txBody>
           <a:bodyPr/>
           <a:lstStyle/>
-          <a:p>
-            <a:r>
-              <a:t>This is the behavior baseline for the rest of the curriculum. The focus is not feature coverage. The focus is safe and repeatable use.</a:t>
-            </a:r>
-          </a:p>
-          <a:p>
-            <a:r>
-              <a:t>Ask learners to name one task where faster output would be dangerous if it changed business meaning, experiment setup, or production operations.</a:t>
-            </a:r>
-          </a:p>
+          <a:p/>
         </p:txBody>
       </p:sp>
       <p:sp>
@@ -593,11 +583,7 @@
         <p:txBody>
           <a:bodyPr/>
           <a:lstStyle/>
-          <a:p>
-            <a:r>
-              <a:t>Emphasize operational caution and dependency awareness. A safe improvement is clarifying what to check before rerunning a failed daily load.</a:t>
-            </a:r>
-          </a:p>
+          <a:p/>
         </p:txBody>
       </p:sp>
       <p:sp>
@@ -663,11 +649,7 @@
         <p:txBody>
           <a:bodyPr/>
           <a:lstStyle/>
-          <a:p>
-            <a:r>
-              <a:t>Repeat the rule: never accept a change you cannot explain.</a:t>
-            </a:r>
-          </a:p>
+          <a:p/>
         </p:txBody>
       </p:sp>
       <p:sp>
@@ -733,16 +715,7 @@
         <p:txBody>
           <a:bodyPr/>
           <a:lstStyle/>
-          <a:p>
-            <a:r>
-              <a:t>This is a short lab. The goal is habit formation, not large output.</a:t>
-            </a:r>
-          </a:p>
-          <a:p>
-            <a:r>
-              <a:t>Demo cue: have learners rewrite one weak prompt from their own backlog and explain why their revised version is safer.</a:t>
-            </a:r>
-          </a:p>
+          <a:p/>
         </p:txBody>
       </p:sp>
       <p:sp>
@@ -808,16 +781,7 @@
         <p:txBody>
           <a:bodyPr/>
           <a:lstStyle/>
-          <a:p>
-            <a:r>
-              <a:t>Use this slide to confirm readiness for module 02.</a:t>
-            </a:r>
-          </a:p>
-          <a:p>
-            <a:r>
-              <a:t>Point forward explicitly: module 02 turns these review habits into actual product setup and readiness checks.</a:t>
-            </a:r>
-          </a:p>
+          <a:p/>
         </p:txBody>
       </p:sp>
       <p:sp>
@@ -883,11 +847,7 @@
         <p:txBody>
           <a:bodyPr/>
           <a:lstStyle/>
-          <a:p>
-            <a:r>
-              <a:t>Ask learners to answer from their real BI, DS, or DE workflows.</a:t>
-            </a:r>
-          </a:p>
+          <a:p/>
         </p:txBody>
       </p:sp>
       <p:sp>
@@ -953,11 +913,7 @@
         <p:txBody>
           <a:bodyPr/>
           <a:lstStyle/>
-          <a:p>
-            <a:r>
-              <a:t>Show the workspace reference file and explain that it translates the official docs into the local beginner baseline.</a:t>
-            </a:r>
-          </a:p>
+          <a:p/>
         </p:txBody>
       </p:sp>
       <p:sp>
@@ -1023,11 +979,7 @@
         <p:txBody>
           <a:bodyPr/>
           <a:lstStyle/>
-          <a:p>
-            <a:r>
-              <a:t>Tell learners that these habits matter more than any single shortcut or feature.</a:t>
-            </a:r>
-          </a:p>
+          <a:p/>
         </p:txBody>
       </p:sp>
       <p:sp>
@@ -1093,11 +1045,7 @@
         <p:txBody>
           <a:bodyPr/>
           <a:lstStyle/>
-          <a:p>
-            <a:r>
-              <a:t>Set the tone early: AI output is a draft, not a decision.</a:t>
-            </a:r>
-          </a:p>
+          <a:p/>
         </p:txBody>
       </p:sp>
       <p:sp>
@@ -1165,7 +1113,22 @@
           <a:lstStyle/>
           <a:p>
             <a:r>
-              <a:t>This sequence should become the default mental model for beginners.</a:t>
+              <a:t>BI: Ask for an explanation of a reporting workflow.</a:t>
+            </a:r>
+          </a:p>
+          <a:p>
+            <a:r>
+              <a:t>DS: Edit a notebook cell to add a missing seed parameter.</a:t>
+            </a:r>
+          </a:p>
+          <a:p>
+            <a:r>
+              <a:t>DE: Plan a pipeline documentation improvement before any edits.</a:t>
+            </a:r>
+          </a:p>
+          <a:p>
+            <a:r>
+              <a:t>DE: Agent can update a pipeline README after scope is agreed.</a:t>
             </a:r>
           </a:p>
         </p:txBody>
@@ -1233,11 +1196,7 @@
         <p:txBody>
           <a:bodyPr/>
           <a:lstStyle/>
-          <a:p>
-            <a:r>
-              <a:t>This is the easiest reusable template learners can take back to work.</a:t>
-            </a:r>
-          </a:p>
+          <a:p/>
         </p:txBody>
       </p:sp>
       <p:sp>
@@ -1303,11 +1262,7 @@
         <p:txBody>
           <a:bodyPr/>
           <a:lstStyle/>
-          <a:p>
-            <a:r>
-              <a:t>Point out that weak context often looks like weak AI, even when the real issue is the prompt setup.</a:t>
-            </a:r>
-          </a:p>
+          <a:p/>
         </p:txBody>
       </p:sp>
       <p:sp>
@@ -1373,11 +1328,7 @@
         <p:txBody>
           <a:bodyPr/>
           <a:lstStyle/>
-          <a:p>
-            <a:r>
-              <a:t>Encourage learners to recognize these as normal mistakes, not personal failures.</a:t>
-            </a:r>
-          </a:p>
+          <a:p/>
         </p:txBody>
       </p:sp>
       <p:sp>
@@ -1443,11 +1394,7 @@
         <p:txBody>
           <a:bodyPr/>
           <a:lstStyle/>
-          <a:p>
-            <a:r>
-              <a:t>Use a concrete example such as a sales dashboard glossary where terms like gross margin and net sales already have approved definitions.</a:t>
-            </a:r>
-          </a:p>
+          <a:p/>
         </p:txBody>
       </p:sp>
       <p:sp>
@@ -1513,11 +1460,7 @@
         <p:txBody>
           <a:bodyPr/>
           <a:lstStyle/>
-          <a:p>
-            <a:r>
-              <a:t>Connect prompt quality to experimental reliability. Show how a missing seed or data snapshot note can make a notebook look reproducible when it is not.</a:t>
-            </a:r>
-          </a:p>
+          <a:p/>
         </p:txBody>
       </p:sp>
       <p:sp>
@@ -4645,7 +4588,7 @@
                 </a:solidFill>
                 <a:latin typeface="Segoe UI"/>
               </a:rPr>
-              <a:t>Beginner Best Practices For GitHub Copilot Agents In VS Code</a:t>
+              <a:t>Presenter Deck</a:t>
             </a:r>
           </a:p>
         </p:txBody>
@@ -4804,7 +4747,7 @@
             <a:avLst/>
           </a:prstGeom>
           <a:solidFill>
-            <a:srgbClr val="2ECC71"/>
+            <a:srgbClr val="0078D4"/>
           </a:solidFill>
           <a:ln>
             <a:noFill/>
@@ -4847,7 +4790,7 @@
             <a:avLst/>
           </a:prstGeom>
           <a:solidFill>
-            <a:srgbClr val="2ECC71"/>
+            <a:srgbClr val="0078D4"/>
           </a:solidFill>
           <a:ln>
             <a:noFill/>
@@ -4905,14 +4848,14 @@
                 </a:solidFill>
                 <a:latin typeface="Segoe UI"/>
               </a:rPr>
-              <a:t>DS Example</a:t>
-            </a:r>
-          </a:p>
-        </p:txBody>
-      </p:sp>
-      <p:sp>
-        <p:nvSpPr>
-          <p:cNvPr id="5" name="Chevron 4"/>
+              <a:t>Review Before You Accept</a:t>
+            </a:r>
+          </a:p>
+        </p:txBody>
+      </p:sp>
+      <p:sp>
+        <p:nvSpPr>
+          <p:cNvPr id="5" name="Rounded Rectangle 4"/>
           <p:cNvSpPr/>
           <p:nvPr/>
         </p:nvSpPr>
@@ -4921,11 +4864,11 @@
             <a:off x="10972800" y="274320"/>
             <a:ext cx="548640" cy="548640"/>
           </a:xfrm>
-          <a:prstGeom prst="chevron">
+          <a:prstGeom prst="roundRect">
             <a:avLst/>
           </a:prstGeom>
           <a:solidFill>
-            <a:srgbClr val="2ECC71"/>
+            <a:srgbClr val="0078D4"/>
           </a:solidFill>
           <a:ln>
             <a:noFill/>
@@ -4983,7 +4926,7 @@
                 </a:solidFill>
                 <a:latin typeface="Segoe UI"/>
               </a:rPr>
-              <a:t>9</a:t>
+              <a:t>8</a:t>
             </a:r>
           </a:p>
         </p:txBody>
@@ -4997,7 +4940,7 @@
         <p:spPr>
           <a:xfrm>
             <a:off x="731520" y="1463040"/>
-            <a:ext cx="6858000" cy="4114800"/>
+            <a:ext cx="10515600" cy="4114800"/>
           </a:xfrm>
           <a:prstGeom prst="rect">
             <a:avLst/>
@@ -5021,7 +4964,7 @@
             <a:r>
               <a:rPr sz="1600">
                 <a:solidFill>
-                  <a:srgbClr val="2ECC71"/>
+                  <a:srgbClr val="0078D4"/>
                 </a:solidFill>
                 <a:latin typeface="Segoe UI"/>
               </a:rPr>
@@ -5034,7 +4977,7 @@
                 </a:solidFill>
                 <a:latin typeface="Segoe UI"/>
               </a:rPr>
-              <a:t>explain a churn-model notebook workflow</a:t>
+              <a:t>Read the diffs</a:t>
             </a:r>
           </a:p>
           <a:p>
@@ -5049,7 +4992,7 @@
             <a:r>
               <a:rPr sz="1600">
                 <a:solidFill>
-                  <a:srgbClr val="2ECC71"/>
+                  <a:srgbClr val="0078D4"/>
                 </a:solidFill>
                 <a:latin typeface="Segoe UI"/>
               </a:rPr>
@@ -5062,132 +5005,70 @@
                 </a:solidFill>
                 <a:latin typeface="Segoe UI"/>
               </a:rPr>
-              <a:t>ask for environment, seed, and data-version notes</a:t>
-            </a:r>
-          </a:p>
-        </p:txBody>
-      </p:sp>
-      <p:sp>
-        <p:nvSpPr>
-          <p:cNvPr id="8" name="Rounded Rectangle 7"/>
-          <p:cNvSpPr/>
-          <p:nvPr/>
-        </p:nvSpPr>
-        <p:spPr>
-          <a:xfrm>
-            <a:off x="8046720" y="1463040"/>
-            <a:ext cx="3840480" cy="1417320"/>
-          </a:xfrm>
-          <a:prstGeom prst="roundRect">
-            <a:avLst/>
-          </a:prstGeom>
-          <a:solidFill>
-            <a:srgbClr val="FDF2E9"/>
-          </a:solidFill>
-          <a:ln w="12700">
-            <a:solidFill>
-              <a:srgbClr val="E0C8A8"/>
-            </a:solidFill>
-          </a:ln>
-        </p:spPr>
-        <p:style>
-          <a:lnRef idx="1">
-            <a:schemeClr val="accent1"/>
-          </a:lnRef>
-          <a:fillRef idx="3">
-            <a:schemeClr val="accent1"/>
-          </a:fillRef>
-          <a:effectRef idx="2">
-            <a:schemeClr val="accent1"/>
-          </a:effectRef>
-          <a:fontRef idx="minor">
-            <a:schemeClr val="lt1"/>
-          </a:fontRef>
-        </p:style>
-        <p:txBody>
-          <a:bodyPr rtlCol="0" anchor="ctr"/>
-          <a:lstStyle/>
-          <a:p>
-            <a:pPr algn="ctr"/>
-          </a:p>
-        </p:txBody>
-      </p:sp>
-      <p:sp>
-        <p:nvSpPr>
-          <p:cNvPr id="9" name="TextBox 8"/>
-          <p:cNvSpPr txBox="1"/>
-          <p:nvPr/>
-        </p:nvSpPr>
-        <p:spPr>
-          <a:xfrm>
-            <a:off x="8229600" y="1554480"/>
-            <a:ext cx="3474720" cy="274320"/>
-          </a:xfrm>
-          <a:prstGeom prst="rect">
-            <a:avLst/>
-          </a:prstGeom>
-          <a:noFill/>
-        </p:spPr>
-        <p:txBody>
-          <a:bodyPr wrap="none">
-            <a:spAutoFit/>
-          </a:bodyPr>
-          <a:lstStyle/>
-          <a:p>
-            <a:r>
-              <a:rPr sz="900" b="1">
-                <a:solidFill>
-                  <a:srgbClr val="5D6D7E"/>
-                </a:solidFill>
-                <a:latin typeface="Segoe UI"/>
-              </a:rPr>
-              <a:t>PRESENTER NOTES</a:t>
-            </a:r>
-          </a:p>
-        </p:txBody>
-      </p:sp>
-      <p:sp>
-        <p:nvSpPr>
-          <p:cNvPr id="10" name="TextBox 9"/>
-          <p:cNvSpPr txBox="1"/>
-          <p:nvPr/>
-        </p:nvSpPr>
-        <p:spPr>
-          <a:xfrm>
-            <a:off x="8229600" y="1828800"/>
-            <a:ext cx="3474720" cy="960120"/>
-          </a:xfrm>
-          <a:prstGeom prst="rect">
-            <a:avLst/>
-          </a:prstGeom>
-          <a:noFill/>
-        </p:spPr>
-        <p:txBody>
-          <a:bodyPr wrap="square">
-            <a:spAutoFit/>
-          </a:bodyPr>
-          <a:lstStyle/>
+              <a:t>Check the command implications</a:t>
+            </a:r>
+          </a:p>
           <a:p>
             <a:pPr>
+              <a:spcBef>
+                <a:spcPts val="400"/>
+              </a:spcBef>
               <a:spcAft>
-                <a:spcPts val="400"/>
+                <a:spcPts val="800"/>
               </a:spcAft>
             </a:pPr>
             <a:r>
-              <a:rPr sz="1100" i="1">
-                <a:solidFill>
-                  <a:srgbClr val="5D6D7E"/>
-                </a:solidFill>
-                <a:latin typeface="Segoe UI"/>
-              </a:rPr>
-              <a:t>Connect prompt quality to experimental reliability. Show how a missing seed or data snapshot note can make a notebook look reproducible when it is not.</a:t>
-            </a:r>
-          </a:p>
-        </p:txBody>
-      </p:sp>
-      <p:sp>
-        <p:nvSpPr>
-          <p:cNvPr id="11" name="Rectangle 10"/>
+              <a:rPr sz="1600">
+                <a:solidFill>
+                  <a:srgbClr val="0078D4"/>
+                </a:solidFill>
+                <a:latin typeface="Segoe UI"/>
+              </a:rPr>
+              <a:t>●  </a:t>
+            </a:r>
+            <a:r>
+              <a:rPr sz="1800">
+                <a:solidFill>
+                  <a:srgbClr val="2C3E50"/>
+                </a:solidFill>
+                <a:latin typeface="Segoe UI"/>
+              </a:rPr>
+              <a:t>Compare output to the request</a:t>
+            </a:r>
+          </a:p>
+          <a:p>
+            <a:pPr>
+              <a:spcBef>
+                <a:spcPts val="400"/>
+              </a:spcBef>
+              <a:spcAft>
+                <a:spcPts val="800"/>
+              </a:spcAft>
+            </a:pPr>
+            <a:r>
+              <a:rPr sz="1600">
+                <a:solidFill>
+                  <a:srgbClr val="0078D4"/>
+                </a:solidFill>
+                <a:latin typeface="Segoe UI"/>
+              </a:rPr>
+              <a:t>●  </a:t>
+            </a:r>
+            <a:r>
+              <a:rPr sz="1800">
+                <a:solidFill>
+                  <a:srgbClr val="2C3E50"/>
+                </a:solidFill>
+                <a:latin typeface="Segoe UI"/>
+              </a:rPr>
+              <a:t>Reject changes you cannot explain</a:t>
+            </a:r>
+          </a:p>
+        </p:txBody>
+      </p:sp>
+      <p:sp>
+        <p:nvSpPr>
+          <p:cNvPr id="8" name="Rectangle 7"/>
           <p:cNvSpPr/>
           <p:nvPr/>
         </p:nvSpPr>
@@ -5231,7 +5112,7 @@
                   <a:srgbClr val="FFFFFF"/>
                 </a:solidFill>
               </a:rPr>
-              <a:t>Beginner Best Practices For GitHub Copilot Agents In VS Code</a:t>
+              <a:t>Presenter Deck</a:t>
             </a:r>
           </a:p>
         </p:txBody>
@@ -5277,7 +5158,7 @@
             <a:avLst/>
           </a:prstGeom>
           <a:solidFill>
-            <a:srgbClr val="2ECC71"/>
+            <a:srgbClr val="0078D4"/>
           </a:solidFill>
           <a:ln>
             <a:noFill/>
@@ -5320,7 +5201,7 @@
             <a:avLst/>
           </a:prstGeom>
           <a:solidFill>
-            <a:srgbClr val="2ECC71"/>
+            <a:srgbClr val="0078D4"/>
           </a:solidFill>
           <a:ln>
             <a:noFill/>
@@ -5378,14 +5259,14 @@
                 </a:solidFill>
                 <a:latin typeface="Segoe UI"/>
               </a:rPr>
-              <a:t>DE Example</a:t>
-            </a:r>
-          </a:p>
-        </p:txBody>
-      </p:sp>
-      <p:sp>
-        <p:nvSpPr>
-          <p:cNvPr id="5" name="Chevron 4"/>
+              <a:t>BI Before And After -- SQL KPI View</a:t>
+            </a:r>
+          </a:p>
+        </p:txBody>
+      </p:sp>
+      <p:sp>
+        <p:nvSpPr>
+          <p:cNvPr id="5" name="Rounded Rectangle 4"/>
           <p:cNvSpPr/>
           <p:nvPr/>
         </p:nvSpPr>
@@ -5394,11 +5275,11 @@
             <a:off x="10972800" y="274320"/>
             <a:ext cx="548640" cy="548640"/>
           </a:xfrm>
-          <a:prstGeom prst="chevron">
+          <a:prstGeom prst="roundRect">
             <a:avLst/>
           </a:prstGeom>
           <a:solidFill>
-            <a:srgbClr val="2ECC71"/>
+            <a:srgbClr val="0078D4"/>
           </a:solidFill>
           <a:ln>
             <a:noFill/>
@@ -5456,7 +5337,7 @@
                 </a:solidFill>
                 <a:latin typeface="Segoe UI"/>
               </a:rPr>
-              <a:t>10</a:t>
+              <a:t>9</a:t>
             </a:r>
           </a:p>
         </p:txBody>
@@ -5470,7 +5351,7 @@
         <p:spPr>
           <a:xfrm>
             <a:off x="731520" y="1463040"/>
-            <a:ext cx="6858000" cy="4114800"/>
+            <a:ext cx="10515600" cy="4114800"/>
           </a:xfrm>
           <a:prstGeom prst="rect">
             <a:avLst/>
@@ -5494,7 +5375,7 @@
             <a:r>
               <a:rPr sz="1600">
                 <a:solidFill>
-                  <a:srgbClr val="2ECC71"/>
+                  <a:srgbClr val="0078D4"/>
                 </a:solidFill>
                 <a:latin typeface="Segoe UI"/>
               </a:rPr>
@@ -5507,7 +5388,7 @@
                 </a:solidFill>
                 <a:latin typeface="Segoe UI"/>
               </a:rPr>
-              <a:t>review an Airflow pipeline runbook</a:t>
+              <a:t>Scenario: Copilot improves a sales KPI view. Review the diff before approving.</a:t>
             </a:r>
           </a:p>
           <a:p>
@@ -5522,7 +5403,7 @@
             <a:r>
               <a:rPr sz="1600">
                 <a:solidFill>
-                  <a:srgbClr val="2ECC71"/>
+                  <a:srgbClr val="0078D4"/>
                 </a:solidFill>
                 <a:latin typeface="Segoe UI"/>
               </a:rPr>
@@ -5535,132 +5416,42 @@
                 </a:solidFill>
                 <a:latin typeface="Segoe UI"/>
               </a:rPr>
-              <a:t>ask for upstream dependency and retry validation guidance</a:t>
-            </a:r>
-          </a:p>
-        </p:txBody>
-      </p:sp>
-      <p:sp>
-        <p:nvSpPr>
-          <p:cNvPr id="8" name="Rounded Rectangle 7"/>
-          <p:cNvSpPr/>
-          <p:nvPr/>
-        </p:nvSpPr>
-        <p:spPr>
-          <a:xfrm>
-            <a:off x="8046720" y="1463040"/>
-            <a:ext cx="3840480" cy="1417320"/>
-          </a:xfrm>
-          <a:prstGeom prst="roundRect">
-            <a:avLst/>
-          </a:prstGeom>
-          <a:solidFill>
-            <a:srgbClr val="FDF2E9"/>
-          </a:solidFill>
-          <a:ln w="12700">
-            <a:solidFill>
-              <a:srgbClr val="E0C8A8"/>
-            </a:solidFill>
-          </a:ln>
-        </p:spPr>
-        <p:style>
-          <a:lnRef idx="1">
-            <a:schemeClr val="accent1"/>
-          </a:lnRef>
-          <a:fillRef idx="3">
-            <a:schemeClr val="accent1"/>
-          </a:fillRef>
-          <a:effectRef idx="2">
-            <a:schemeClr val="accent1"/>
-          </a:effectRef>
-          <a:fontRef idx="minor">
-            <a:schemeClr val="lt1"/>
-          </a:fontRef>
-        </p:style>
-        <p:txBody>
-          <a:bodyPr rtlCol="0" anchor="ctr"/>
-          <a:lstStyle/>
-          <a:p>
-            <a:pPr algn="ctr"/>
-          </a:p>
-        </p:txBody>
-      </p:sp>
-      <p:sp>
-        <p:nvSpPr>
-          <p:cNvPr id="9" name="TextBox 8"/>
-          <p:cNvSpPr txBox="1"/>
-          <p:nvPr/>
-        </p:nvSpPr>
-        <p:spPr>
-          <a:xfrm>
-            <a:off x="8229600" y="1554480"/>
-            <a:ext cx="3474720" cy="274320"/>
-          </a:xfrm>
-          <a:prstGeom prst="rect">
-            <a:avLst/>
-          </a:prstGeom>
-          <a:noFill/>
-        </p:spPr>
-        <p:txBody>
-          <a:bodyPr wrap="none">
-            <a:spAutoFit/>
-          </a:bodyPr>
-          <a:lstStyle/>
-          <a:p>
-            <a:r>
-              <a:rPr sz="900" b="1">
-                <a:solidFill>
-                  <a:srgbClr val="5D6D7E"/>
-                </a:solidFill>
-                <a:latin typeface="Segoe UI"/>
-              </a:rPr>
-              <a:t>PRESENTER NOTES</a:t>
-            </a:r>
-          </a:p>
-        </p:txBody>
-      </p:sp>
-      <p:sp>
-        <p:nvSpPr>
-          <p:cNvPr id="10" name="TextBox 9"/>
-          <p:cNvSpPr txBox="1"/>
-          <p:nvPr/>
-        </p:nvSpPr>
-        <p:spPr>
-          <a:xfrm>
-            <a:off x="8229600" y="1828800"/>
-            <a:ext cx="3474720" cy="960120"/>
-          </a:xfrm>
-          <a:prstGeom prst="rect">
-            <a:avLst/>
-          </a:prstGeom>
-          <a:noFill/>
-        </p:spPr>
-        <p:txBody>
-          <a:bodyPr wrap="square">
-            <a:spAutoFit/>
-          </a:bodyPr>
-          <a:lstStyle/>
+              <a:t>Review: Did the AI change the **definition** of margin or just add clarity?</a:t>
+            </a:r>
+          </a:p>
           <a:p>
             <a:pPr>
+              <a:spcBef>
+                <a:spcPts val="400"/>
+              </a:spcBef>
               <a:spcAft>
-                <a:spcPts val="400"/>
+                <a:spcPts val="800"/>
               </a:spcAft>
             </a:pPr>
             <a:r>
-              <a:rPr sz="1100" i="1">
-                <a:solidFill>
-                  <a:srgbClr val="5D6D7E"/>
-                </a:solidFill>
-                <a:latin typeface="Segoe UI"/>
-              </a:rPr>
-              <a:t>Emphasize operational caution and dependency awareness. A safe improvement is clarifying what to check before rerunning a failed daily load.</a:t>
-            </a:r>
-          </a:p>
-        </p:txBody>
-      </p:sp>
-      <p:sp>
-        <p:nvSpPr>
-          <p:cNvPr id="11" name="Rectangle 10"/>
+              <a:rPr sz="1600">
+                <a:solidFill>
+                  <a:srgbClr val="0078D4"/>
+                </a:solidFill>
+                <a:latin typeface="Segoe UI"/>
+              </a:rPr>
+              <a:t>●  </a:t>
+            </a:r>
+            <a:r>
+              <a:rPr sz="1800">
+                <a:solidFill>
+                  <a:srgbClr val="2C3E50"/>
+                </a:solidFill>
+                <a:latin typeface="Segoe UI"/>
+              </a:rPr>
+              <a:t>Decision: Keep, Revise, or Reject?</a:t>
+            </a:r>
+          </a:p>
+        </p:txBody>
+      </p:sp>
+      <p:sp>
+        <p:nvSpPr>
+          <p:cNvPr id="8" name="Rectangle 7"/>
           <p:cNvSpPr/>
           <p:nvPr/>
         </p:nvSpPr>
@@ -5704,7 +5495,7 @@
                   <a:srgbClr val="FFFFFF"/>
                 </a:solidFill>
               </a:rPr>
-              <a:t>Beginner Best Practices For GitHub Copilot Agents In VS Code</a:t>
+              <a:t>Presenter Deck</a:t>
             </a:r>
           </a:p>
         </p:txBody>
@@ -5851,7 +5642,7 @@
                 </a:solidFill>
                 <a:latin typeface="Segoe UI"/>
               </a:rPr>
-              <a:t>Review Before Accepting</a:t>
+              <a:t>DS Before And After -- Notebook Cell</a:t>
             </a:r>
           </a:p>
         </p:txBody>
@@ -5929,7 +5720,7 @@
                 </a:solidFill>
                 <a:latin typeface="Segoe UI"/>
               </a:rPr>
-              <a:t>11</a:t>
+              <a:t>10</a:t>
             </a:r>
           </a:p>
         </p:txBody>
@@ -5943,7 +5734,7 @@
         <p:spPr>
           <a:xfrm>
             <a:off x="731520" y="1463040"/>
-            <a:ext cx="6858000" cy="4114800"/>
+            <a:ext cx="10515600" cy="4114800"/>
           </a:xfrm>
           <a:prstGeom prst="rect">
             <a:avLst/>
@@ -5980,7 +5771,7 @@
                 </a:solidFill>
                 <a:latin typeface="Segoe UI"/>
               </a:rPr>
-              <a:t>read diffs</a:t>
+              <a:t>Scenario: Copilot adds reproducibility guards to a churn-model notebook cell.</a:t>
             </a:r>
           </a:p>
           <a:p>
@@ -6008,7 +5799,7 @@
                 </a:solidFill>
                 <a:latin typeface="Segoe UI"/>
               </a:rPr>
-              <a:t>verify commands</a:t>
+              <a:t>Review: Are the **seed** and **data version comment** correct for your experiment?</a:t>
             </a:r>
           </a:p>
           <a:p>
@@ -6036,160 +5827,14 @@
                 </a:solidFill>
                 <a:latin typeface="Segoe UI"/>
               </a:rPr>
-              <a:t>confirm the output matches the ask</a:t>
-            </a:r>
-          </a:p>
-          <a:p>
-            <a:pPr>
-              <a:spcBef>
-                <a:spcPts val="400"/>
-              </a:spcBef>
-              <a:spcAft>
-                <a:spcPts val="800"/>
-              </a:spcAft>
-            </a:pPr>
-            <a:r>
-              <a:rPr sz="1600">
-                <a:solidFill>
-                  <a:srgbClr val="0078D4"/>
-                </a:solidFill>
-                <a:latin typeface="Segoe UI"/>
-              </a:rPr>
-              <a:t>●  </a:t>
-            </a:r>
-            <a:r>
-              <a:rPr sz="1800">
-                <a:solidFill>
-                  <a:srgbClr val="2C3E50"/>
-                </a:solidFill>
-                <a:latin typeface="Segoe UI"/>
-              </a:rPr>
-              <a:t>reject or refine when needed</a:t>
-            </a:r>
-          </a:p>
-        </p:txBody>
-      </p:sp>
-      <p:sp>
-        <p:nvSpPr>
-          <p:cNvPr id="8" name="Rounded Rectangle 7"/>
-          <p:cNvSpPr/>
-          <p:nvPr/>
-        </p:nvSpPr>
-        <p:spPr>
-          <a:xfrm>
-            <a:off x="8046720" y="1463040"/>
-            <a:ext cx="3840480" cy="1417320"/>
-          </a:xfrm>
-          <a:prstGeom prst="roundRect">
-            <a:avLst/>
-          </a:prstGeom>
-          <a:solidFill>
-            <a:srgbClr val="FDF2E9"/>
-          </a:solidFill>
-          <a:ln w="12700">
-            <a:solidFill>
-              <a:srgbClr val="E0C8A8"/>
-            </a:solidFill>
-          </a:ln>
-        </p:spPr>
-        <p:style>
-          <a:lnRef idx="1">
-            <a:schemeClr val="accent1"/>
-          </a:lnRef>
-          <a:fillRef idx="3">
-            <a:schemeClr val="accent1"/>
-          </a:fillRef>
-          <a:effectRef idx="2">
-            <a:schemeClr val="accent1"/>
-          </a:effectRef>
-          <a:fontRef idx="minor">
-            <a:schemeClr val="lt1"/>
-          </a:fontRef>
-        </p:style>
-        <p:txBody>
-          <a:bodyPr rtlCol="0" anchor="ctr"/>
-          <a:lstStyle/>
-          <a:p>
-            <a:pPr algn="ctr"/>
-          </a:p>
-        </p:txBody>
-      </p:sp>
-      <p:sp>
-        <p:nvSpPr>
-          <p:cNvPr id="9" name="TextBox 8"/>
-          <p:cNvSpPr txBox="1"/>
-          <p:nvPr/>
-        </p:nvSpPr>
-        <p:spPr>
-          <a:xfrm>
-            <a:off x="8229600" y="1554480"/>
-            <a:ext cx="3474720" cy="274320"/>
-          </a:xfrm>
-          <a:prstGeom prst="rect">
-            <a:avLst/>
-          </a:prstGeom>
-          <a:noFill/>
-        </p:spPr>
-        <p:txBody>
-          <a:bodyPr wrap="none">
-            <a:spAutoFit/>
-          </a:bodyPr>
-          <a:lstStyle/>
-          <a:p>
-            <a:r>
-              <a:rPr sz="900" b="1">
-                <a:solidFill>
-                  <a:srgbClr val="5D6D7E"/>
-                </a:solidFill>
-                <a:latin typeface="Segoe UI"/>
-              </a:rPr>
-              <a:t>PRESENTER NOTES</a:t>
-            </a:r>
-          </a:p>
-        </p:txBody>
-      </p:sp>
-      <p:sp>
-        <p:nvSpPr>
-          <p:cNvPr id="10" name="TextBox 9"/>
-          <p:cNvSpPr txBox="1"/>
-          <p:nvPr/>
-        </p:nvSpPr>
-        <p:spPr>
-          <a:xfrm>
-            <a:off x="8229600" y="1828800"/>
-            <a:ext cx="3474720" cy="960120"/>
-          </a:xfrm>
-          <a:prstGeom prst="rect">
-            <a:avLst/>
-          </a:prstGeom>
-          <a:noFill/>
-        </p:spPr>
-        <p:txBody>
-          <a:bodyPr wrap="square">
-            <a:spAutoFit/>
-          </a:bodyPr>
-          <a:lstStyle/>
-          <a:p>
-            <a:pPr>
-              <a:spcAft>
-                <a:spcPts val="400"/>
-              </a:spcAft>
-            </a:pPr>
-            <a:r>
-              <a:rPr sz="1100" i="1">
-                <a:solidFill>
-                  <a:srgbClr val="5D6D7E"/>
-                </a:solidFill>
-                <a:latin typeface="Segoe UI"/>
-              </a:rPr>
-              <a:t>Repeat the rule: never accept a change you cannot explain.</a:t>
-            </a:r>
-          </a:p>
-        </p:txBody>
-      </p:sp>
-      <p:sp>
-        <p:nvSpPr>
-          <p:cNvPr id="11" name="Rectangle 10"/>
+              <a:t>Decision: Keep, Revise, or Reject?</a:t>
+            </a:r>
+          </a:p>
+        </p:txBody>
+      </p:sp>
+      <p:sp>
+        <p:nvSpPr>
+          <p:cNvPr id="8" name="Rectangle 7"/>
           <p:cNvSpPr/>
           <p:nvPr/>
         </p:nvSpPr>
@@ -6233,7 +5878,7 @@
                   <a:srgbClr val="FFFFFF"/>
                 </a:solidFill>
               </a:rPr>
-              <a:t>Beginner Best Practices For GitHub Copilot Agents In VS Code</a:t>
+              <a:t>Presenter Deck</a:t>
             </a:r>
           </a:p>
         </p:txBody>
@@ -6252,7 +5897,7 @@
     <p:bg>
       <p:bgPr>
         <a:solidFill>
-          <a:srgbClr val="0078D4"/>
+          <a:srgbClr val="FFFFFF"/>
         </a:solidFill>
         <a:effectLst/>
       </p:bgPr>
@@ -6266,20 +5911,20 @@
       <p:grpSpPr/>
       <p:sp>
         <p:nvSpPr>
-          <p:cNvPr id="2" name="Oval 1"/>
+          <p:cNvPr id="2" name="Rectangle 1"/>
           <p:cNvSpPr/>
           <p:nvPr/>
         </p:nvSpPr>
         <p:spPr>
           <a:xfrm>
-            <a:off x="-1828800" y="-1828800"/>
-            <a:ext cx="4572000" cy="4572000"/>
-          </a:xfrm>
-          <a:prstGeom prst="ellipse">
+            <a:off x="0" y="0"/>
+            <a:ext cx="12191695" cy="1097280"/>
+          </a:xfrm>
+          <a:prstGeom prst="rect">
             <a:avLst/>
           </a:prstGeom>
           <a:solidFill>
-            <a:srgbClr val="006ABE"/>
+            <a:srgbClr val="0078D4"/>
           </a:solidFill>
           <a:ln>
             <a:noFill/>
@@ -6309,20 +5954,20 @@
       </p:sp>
       <p:sp>
         <p:nvSpPr>
-          <p:cNvPr id="3" name="Oval 2"/>
+          <p:cNvPr id="3" name="Rectangle 2"/>
           <p:cNvSpPr/>
           <p:nvPr/>
         </p:nvSpPr>
         <p:spPr>
           <a:xfrm>
-            <a:off x="9144000" y="3657600"/>
-            <a:ext cx="3657600" cy="3657600"/>
-          </a:xfrm>
-          <a:prstGeom prst="ellipse">
+            <a:off x="0" y="0"/>
+            <a:ext cx="73152" cy="6858000"/>
+          </a:xfrm>
+          <a:prstGeom prst="rect">
             <a:avLst/>
           </a:prstGeom>
           <a:solidFill>
-            <a:srgbClr val="006ABE"/>
+            <a:srgbClr val="0078D4"/>
           </a:solidFill>
           <a:ln>
             <a:noFill/>
@@ -6358,8 +6003,8 @@
         </p:nvSpPr>
         <p:spPr>
           <a:xfrm>
-            <a:off x="1828800" y="2286000"/>
-            <a:ext cx="8229600" cy="1371600"/>
+            <a:off x="731520" y="228600"/>
+            <a:ext cx="9144000" cy="731520"/>
           </a:xfrm>
           <a:prstGeom prst="rect">
             <a:avLst/>
@@ -6372,29 +6017,72 @@
           </a:bodyPr>
           <a:lstStyle/>
           <a:p>
+            <a:pPr algn="l"/>
+            <a:r>
+              <a:rPr sz="2800" b="1">
+                <a:solidFill>
+                  <a:srgbClr val="FFFFFF"/>
+                </a:solidFill>
+                <a:latin typeface="Segoe UI"/>
+              </a:rPr>
+              <a:t>DE Before And After -- Pipeline Task</a:t>
+            </a:r>
+          </a:p>
+        </p:txBody>
+      </p:sp>
+      <p:sp>
+        <p:nvSpPr>
+          <p:cNvPr id="5" name="Rounded Rectangle 4"/>
+          <p:cNvSpPr/>
+          <p:nvPr/>
+        </p:nvSpPr>
+        <p:spPr>
+          <a:xfrm>
+            <a:off x="10972800" y="274320"/>
+            <a:ext cx="548640" cy="548640"/>
+          </a:xfrm>
+          <a:prstGeom prst="roundRect">
+            <a:avLst/>
+          </a:prstGeom>
+          <a:solidFill>
+            <a:srgbClr val="0078D4"/>
+          </a:solidFill>
+          <a:ln>
+            <a:noFill/>
+          </a:ln>
+        </p:spPr>
+        <p:style>
+          <a:lnRef idx="1">
+            <a:schemeClr val="accent1"/>
+          </a:lnRef>
+          <a:fillRef idx="3">
+            <a:schemeClr val="accent1"/>
+          </a:fillRef>
+          <a:effectRef idx="2">
+            <a:schemeClr val="accent1"/>
+          </a:effectRef>
+          <a:fontRef idx="minor">
+            <a:schemeClr val="lt1"/>
+          </a:fontRef>
+        </p:style>
+        <p:txBody>
+          <a:bodyPr rtlCol="0" anchor="ctr"/>
+          <a:lstStyle/>
+          <a:p>
             <a:pPr algn="ctr"/>
-            <a:r>
-              <a:rPr sz="3600" b="1">
-                <a:solidFill>
-                  <a:srgbClr val="FFFFFF"/>
-                </a:solidFill>
-                <a:latin typeface="Segoe UI"/>
-              </a:rPr>
-              <a:t>Hands-On Lab</a:t>
-            </a:r>
-          </a:p>
-        </p:txBody>
-      </p:sp>
-      <p:sp>
-        <p:nvSpPr>
-          <p:cNvPr id="5" name="TextBox 4"/>
+          </a:p>
+        </p:txBody>
+      </p:sp>
+      <p:sp>
+        <p:nvSpPr>
+          <p:cNvPr id="6" name="TextBox 5"/>
           <p:cNvSpPr txBox="1"/>
           <p:nvPr/>
         </p:nvSpPr>
         <p:spPr>
           <a:xfrm>
-            <a:off x="1828800" y="3840480"/>
-            <a:ext cx="8229600" cy="731520"/>
+            <a:off x="10789920" y="228600"/>
+            <a:ext cx="1097280" cy="365760"/>
           </a:xfrm>
           <a:prstGeom prst="rect">
             <a:avLst/>
@@ -6407,15 +6095,173 @@
           </a:bodyPr>
           <a:lstStyle/>
           <a:p>
+            <a:pPr algn="r"/>
+            <a:r>
+              <a:rPr sz="1200" b="0">
+                <a:solidFill>
+                  <a:srgbClr val="FFFFFF"/>
+                </a:solidFill>
+                <a:latin typeface="Segoe UI"/>
+              </a:rPr>
+              <a:t>11</a:t>
+            </a:r>
+          </a:p>
+        </p:txBody>
+      </p:sp>
+      <p:sp>
+        <p:nvSpPr>
+          <p:cNvPr id="7" name="TextBox 6"/>
+          <p:cNvSpPr txBox="1"/>
+          <p:nvPr/>
+        </p:nvSpPr>
+        <p:spPr>
+          <a:xfrm>
+            <a:off x="731520" y="1463040"/>
+            <a:ext cx="10515600" cy="4114800"/>
+          </a:xfrm>
+          <a:prstGeom prst="rect">
+            <a:avLst/>
+          </a:prstGeom>
+          <a:noFill/>
+        </p:spPr>
+        <p:txBody>
+          <a:bodyPr wrap="square">
+            <a:spAutoFit/>
+          </a:bodyPr>
+          <a:lstStyle/>
+          <a:p>
+            <a:pPr>
+              <a:spcBef>
+                <a:spcPts val="400"/>
+              </a:spcBef>
+              <a:spcAft>
+                <a:spcPts val="800"/>
+              </a:spcAft>
+            </a:pPr>
+            <a:r>
+              <a:rPr sz="1600">
+                <a:solidFill>
+                  <a:srgbClr val="0078D4"/>
+                </a:solidFill>
+                <a:latin typeface="Segoe UI"/>
+              </a:rPr>
+              <a:t>●  </a:t>
+            </a:r>
+            <a:r>
+              <a:rPr sz="1800">
+                <a:solidFill>
+                  <a:srgbClr val="2C3E50"/>
+                </a:solidFill>
+                <a:latin typeface="Segoe UI"/>
+              </a:rPr>
+              <a:t>Scenario: Copilot adds retry logic and operational notes to an Airflow task.</a:t>
+            </a:r>
+          </a:p>
+          <a:p>
+            <a:pPr>
+              <a:spcBef>
+                <a:spcPts val="400"/>
+              </a:spcBef>
+              <a:spcAft>
+                <a:spcPts val="800"/>
+              </a:spcAft>
+            </a:pPr>
+            <a:r>
+              <a:rPr sz="1600">
+                <a:solidFill>
+                  <a:srgbClr val="0078D4"/>
+                </a:solidFill>
+                <a:latin typeface="Segoe UI"/>
+              </a:rPr>
+              <a:t>●  </a:t>
+            </a:r>
+            <a:r>
+              <a:rPr sz="1800">
+                <a:solidFill>
+                  <a:srgbClr val="2C3E50"/>
+                </a:solidFill>
+                <a:latin typeface="Segoe UI"/>
+              </a:rPr>
+              <a:t>Review: Are the **retry count**, **delay**, and **escalation path** correct for your SLA?</a:t>
+            </a:r>
+          </a:p>
+          <a:p>
+            <a:pPr>
+              <a:spcBef>
+                <a:spcPts val="400"/>
+              </a:spcBef>
+              <a:spcAft>
+                <a:spcPts val="800"/>
+              </a:spcAft>
+            </a:pPr>
+            <a:r>
+              <a:rPr sz="1600">
+                <a:solidFill>
+                  <a:srgbClr val="0078D4"/>
+                </a:solidFill>
+                <a:latin typeface="Segoe UI"/>
+              </a:rPr>
+              <a:t>●  </a:t>
+            </a:r>
+            <a:r>
+              <a:rPr sz="1800">
+                <a:solidFill>
+                  <a:srgbClr val="2C3E50"/>
+                </a:solidFill>
+                <a:latin typeface="Segoe UI"/>
+              </a:rPr>
+              <a:t>Decision: Keep, Revise, or Reject?</a:t>
+            </a:r>
+          </a:p>
+        </p:txBody>
+      </p:sp>
+      <p:sp>
+        <p:nvSpPr>
+          <p:cNvPr id="8" name="Rectangle 7"/>
+          <p:cNvSpPr/>
+          <p:nvPr/>
+        </p:nvSpPr>
+        <p:spPr>
+          <a:xfrm>
+            <a:off x="0" y="6446520"/>
+            <a:ext cx="12191695" cy="411480"/>
+          </a:xfrm>
+          <a:prstGeom prst="rect">
+            <a:avLst/>
+          </a:prstGeom>
+          <a:solidFill>
+            <a:srgbClr val="1B3A5C"/>
+          </a:solidFill>
+          <a:ln>
+            <a:noFill/>
+          </a:ln>
+        </p:spPr>
+        <p:style>
+          <a:lnRef idx="1">
+            <a:schemeClr val="accent1"/>
+          </a:lnRef>
+          <a:fillRef idx="3">
+            <a:schemeClr val="accent1"/>
+          </a:fillRef>
+          <a:effectRef idx="2">
+            <a:schemeClr val="accent1"/>
+          </a:effectRef>
+          <a:fontRef idx="minor">
+            <a:schemeClr val="lt1"/>
+          </a:fontRef>
+        </p:style>
+        <p:txBody>
+          <a:bodyPr rtlCol="0" anchor="ctr" wrap="square"/>
+          <a:lstStyle/>
+          <a:p>
             <a:pPr algn="ctr"/>
             <a:r>
-              <a:rPr sz="1800" b="0">
-                <a:solidFill>
-                  <a:srgbClr val="D6EAF8"/>
-                </a:solidFill>
-                <a:latin typeface="Segoe UI"/>
-              </a:rPr>
-              <a:t>Time to practice</a:t>
+              <a:rPr sz="1000">
+                <a:solidFill>
+                  <a:srgbClr val="FFFFFF"/>
+                </a:solidFill>
+              </a:rPr>
+              <a:t>Presenter Deck</a:t>
             </a:r>
           </a:p>
         </p:txBody>
@@ -6461,7 +6307,7 @@
             <a:avLst/>
           </a:prstGeom>
           <a:solidFill>
-            <a:srgbClr val="2ECC71"/>
+            <a:srgbClr val="0078D4"/>
           </a:solidFill>
           <a:ln>
             <a:noFill/>
@@ -6504,7 +6350,7 @@
             <a:avLst/>
           </a:prstGeom>
           <a:solidFill>
-            <a:srgbClr val="2ECC71"/>
+            <a:srgbClr val="0078D4"/>
           </a:solidFill>
           <a:ln>
             <a:noFill/>
@@ -6562,14 +6408,14 @@
                 </a:solidFill>
                 <a:latin typeface="Segoe UI"/>
               </a:rPr>
-              <a:t>Hands-On Lab</a:t>
-            </a:r>
-          </a:p>
-        </p:txBody>
-      </p:sp>
-      <p:sp>
-        <p:nvSpPr>
-          <p:cNvPr id="5" name="Process 4"/>
+              <a:t>Reuse What Works</a:t>
+            </a:r>
+          </a:p>
+        </p:txBody>
+      </p:sp>
+      <p:sp>
+        <p:nvSpPr>
+          <p:cNvPr id="5" name="Rounded Rectangle 4"/>
           <p:cNvSpPr/>
           <p:nvPr/>
         </p:nvSpPr>
@@ -6578,11 +6424,11 @@
             <a:off x="10972800" y="274320"/>
             <a:ext cx="548640" cy="548640"/>
           </a:xfrm>
-          <a:prstGeom prst="flowChartProcess">
+          <a:prstGeom prst="roundRect">
             <a:avLst/>
           </a:prstGeom>
           <a:solidFill>
-            <a:srgbClr val="2ECC71"/>
+            <a:srgbClr val="0078D4"/>
           </a:solidFill>
           <a:ln>
             <a:noFill/>
@@ -6654,7 +6500,7 @@
         <p:spPr>
           <a:xfrm>
             <a:off x="731520" y="1463040"/>
-            <a:ext cx="6858000" cy="4114800"/>
+            <a:ext cx="10515600" cy="4114800"/>
           </a:xfrm>
           <a:prstGeom prst="rect">
             <a:avLst/>
@@ -6678,7 +6524,7 @@
             <a:r>
               <a:rPr sz="1600">
                 <a:solidFill>
-                  <a:srgbClr val="2ECC71"/>
+                  <a:srgbClr val="0078D4"/>
                 </a:solidFill>
                 <a:latin typeface="Segoe UI"/>
               </a:rPr>
@@ -6691,7 +6537,7 @@
                 </a:solidFill>
                 <a:latin typeface="Segoe UI"/>
               </a:rPr>
-              <a:t>improve one weak prompt</a:t>
+              <a:t>Workspace instructions for shared defaults</a:t>
             </a:r>
           </a:p>
           <a:p>
@@ -6706,7 +6552,7 @@
             <a:r>
               <a:rPr sz="1600">
                 <a:solidFill>
-                  <a:srgbClr val="2ECC71"/>
+                  <a:srgbClr val="0078D4"/>
                 </a:solidFill>
                 <a:latin typeface="Segoe UI"/>
               </a:rPr>
@@ -6719,7 +6565,7 @@
                 </a:solidFill>
                 <a:latin typeface="Segoe UI"/>
               </a:rPr>
-              <a:t>choose the safest mode</a:t>
+              <a:t>Prompt files for repeatable tasks</a:t>
             </a:r>
           </a:p>
           <a:p>
@@ -6734,7 +6580,7 @@
             <a:r>
               <a:rPr sz="1600">
                 <a:solidFill>
-                  <a:srgbClr val="2ECC71"/>
+                  <a:srgbClr val="0078D4"/>
                 </a:solidFill>
                 <a:latin typeface="Segoe UI"/>
               </a:rPr>
@@ -6747,176 +6593,14 @@
                 </a:solidFill>
                 <a:latin typeface="Segoe UI"/>
               </a:rPr>
-              <a:t>write one review rule</a:t>
-            </a:r>
-          </a:p>
-          <a:p>
-            <a:pPr>
-              <a:spcBef>
-                <a:spcPts val="400"/>
-              </a:spcBef>
-              <a:spcAft>
-                <a:spcPts val="800"/>
-              </a:spcAft>
-            </a:pPr>
-            <a:r>
-              <a:rPr sz="1600">
-                <a:solidFill>
-                  <a:srgbClr val="2ECC71"/>
-                </a:solidFill>
-                <a:latin typeface="Segoe UI"/>
-              </a:rPr>
-              <a:t>●  </a:t>
-            </a:r>
-            <a:r>
-              <a:rPr sz="1800">
-                <a:solidFill>
-                  <a:srgbClr val="2C3E50"/>
-                </a:solidFill>
-                <a:latin typeface="Segoe UI"/>
-              </a:rPr>
-              <a:t>define one team guardrail</a:t>
-            </a:r>
-          </a:p>
-        </p:txBody>
-      </p:sp>
-      <p:sp>
-        <p:nvSpPr>
-          <p:cNvPr id="8" name="Rounded Rectangle 7"/>
-          <p:cNvSpPr/>
-          <p:nvPr/>
-        </p:nvSpPr>
-        <p:spPr>
-          <a:xfrm>
-            <a:off x="8046720" y="1463040"/>
-            <a:ext cx="3840480" cy="1920240"/>
-          </a:xfrm>
-          <a:prstGeom prst="roundRect">
-            <a:avLst/>
-          </a:prstGeom>
-          <a:solidFill>
-            <a:srgbClr val="FDF2E9"/>
-          </a:solidFill>
-          <a:ln w="12700">
-            <a:solidFill>
-              <a:srgbClr val="E0C8A8"/>
-            </a:solidFill>
-          </a:ln>
-        </p:spPr>
-        <p:style>
-          <a:lnRef idx="1">
-            <a:schemeClr val="accent1"/>
-          </a:lnRef>
-          <a:fillRef idx="3">
-            <a:schemeClr val="accent1"/>
-          </a:fillRef>
-          <a:effectRef idx="2">
-            <a:schemeClr val="accent1"/>
-          </a:effectRef>
-          <a:fontRef idx="minor">
-            <a:schemeClr val="lt1"/>
-          </a:fontRef>
-        </p:style>
-        <p:txBody>
-          <a:bodyPr rtlCol="0" anchor="ctr"/>
-          <a:lstStyle/>
-          <a:p>
-            <a:pPr algn="ctr"/>
-          </a:p>
-        </p:txBody>
-      </p:sp>
-      <p:sp>
-        <p:nvSpPr>
-          <p:cNvPr id="9" name="TextBox 8"/>
-          <p:cNvSpPr txBox="1"/>
-          <p:nvPr/>
-        </p:nvSpPr>
-        <p:spPr>
-          <a:xfrm>
-            <a:off x="8229600" y="1554480"/>
-            <a:ext cx="3474720" cy="274320"/>
-          </a:xfrm>
-          <a:prstGeom prst="rect">
-            <a:avLst/>
-          </a:prstGeom>
-          <a:noFill/>
-        </p:spPr>
-        <p:txBody>
-          <a:bodyPr wrap="none">
-            <a:spAutoFit/>
-          </a:bodyPr>
-          <a:lstStyle/>
-          <a:p>
-            <a:r>
-              <a:rPr sz="900" b="1">
-                <a:solidFill>
-                  <a:srgbClr val="5D6D7E"/>
-                </a:solidFill>
-                <a:latin typeface="Segoe UI"/>
-              </a:rPr>
-              <a:t>PRESENTER NOTES</a:t>
-            </a:r>
-          </a:p>
-        </p:txBody>
-      </p:sp>
-      <p:sp>
-        <p:nvSpPr>
-          <p:cNvPr id="10" name="TextBox 9"/>
-          <p:cNvSpPr txBox="1"/>
-          <p:nvPr/>
-        </p:nvSpPr>
-        <p:spPr>
-          <a:xfrm>
-            <a:off x="8229600" y="1828800"/>
-            <a:ext cx="3474720" cy="1463040"/>
-          </a:xfrm>
-          <a:prstGeom prst="rect">
-            <a:avLst/>
-          </a:prstGeom>
-          <a:noFill/>
-        </p:spPr>
-        <p:txBody>
-          <a:bodyPr wrap="square">
-            <a:spAutoFit/>
-          </a:bodyPr>
-          <a:lstStyle/>
-          <a:p>
-            <a:pPr>
-              <a:spcAft>
-                <a:spcPts val="400"/>
-              </a:spcAft>
-            </a:pPr>
-            <a:r>
-              <a:rPr sz="1100" i="1">
-                <a:solidFill>
-                  <a:srgbClr val="5D6D7E"/>
-                </a:solidFill>
-                <a:latin typeface="Segoe UI"/>
-              </a:rPr>
-              <a:t>This is a short lab. The goal is habit formation, not large output.</a:t>
-            </a:r>
-          </a:p>
-          <a:p>
-            <a:pPr>
-              <a:spcAft>
-                <a:spcPts val="400"/>
-              </a:spcAft>
-            </a:pPr>
-            <a:r>
-              <a:rPr sz="1100" i="1">
-                <a:solidFill>
-                  <a:srgbClr val="5D6D7E"/>
-                </a:solidFill>
-                <a:latin typeface="Segoe UI"/>
-              </a:rPr>
-              <a:t>Demo cue: have learners rewrite one weak prompt from their own backlog and explain why their revised version is safer.</a:t>
-            </a:r>
-          </a:p>
-        </p:txBody>
-      </p:sp>
-      <p:sp>
-        <p:nvSpPr>
-          <p:cNvPr id="11" name="Rectangle 10"/>
+              <a:t>New sessions when context drifts</a:t>
+            </a:r>
+          </a:p>
+        </p:txBody>
+      </p:sp>
+      <p:sp>
+        <p:nvSpPr>
+          <p:cNvPr id="8" name="Rectangle 7"/>
           <p:cNvSpPr/>
           <p:nvPr/>
         </p:nvSpPr>
@@ -6960,7 +6644,7 @@
                   <a:srgbClr val="FFFFFF"/>
                 </a:solidFill>
               </a:rPr>
-              <a:t>Beginner Best Practices For GitHub Copilot Agents In VS Code</a:t>
+              <a:t>Presenter Deck</a:t>
             </a:r>
           </a:p>
         </p:txBody>
@@ -7006,7 +6690,7 @@
             <a:avLst/>
           </a:prstGeom>
           <a:solidFill>
-            <a:srgbClr val="E74C3C"/>
+            <a:srgbClr val="0078D4"/>
           </a:solidFill>
           <a:ln>
             <a:noFill/>
@@ -7049,7 +6733,7 @@
             <a:avLst/>
           </a:prstGeom>
           <a:solidFill>
-            <a:srgbClr val="E74C3C"/>
+            <a:srgbClr val="0078D4"/>
           </a:solidFill>
           <a:ln>
             <a:noFill/>
@@ -7107,14 +6791,14 @@
                 </a:solidFill>
                 <a:latin typeface="Segoe UI"/>
               </a:rPr>
-              <a:t>Validation Checklist</a:t>
-            </a:r>
-          </a:p>
-        </p:txBody>
-      </p:sp>
-      <p:sp>
-        <p:nvSpPr>
-          <p:cNvPr id="5" name="Decision 4"/>
+              <a:t>Common Mistakes</a:t>
+            </a:r>
+          </a:p>
+        </p:txBody>
+      </p:sp>
+      <p:sp>
+        <p:nvSpPr>
+          <p:cNvPr id="5" name="Rounded Rectangle 4"/>
           <p:cNvSpPr/>
           <p:nvPr/>
         </p:nvSpPr>
@@ -7123,11 +6807,11 @@
             <a:off x="10972800" y="274320"/>
             <a:ext cx="548640" cy="548640"/>
           </a:xfrm>
-          <a:prstGeom prst="flowChartDecision">
+          <a:prstGeom prst="roundRect">
             <a:avLst/>
           </a:prstGeom>
           <a:solidFill>
-            <a:srgbClr val="E74C3C"/>
+            <a:srgbClr val="0078D4"/>
           </a:solidFill>
           <a:ln>
             <a:noFill/>
@@ -7199,7 +6883,7 @@
         <p:spPr>
           <a:xfrm>
             <a:off x="731520" y="1463040"/>
-            <a:ext cx="6858000" cy="4114800"/>
+            <a:ext cx="10515600" cy="4114800"/>
           </a:xfrm>
           <a:prstGeom prst="rect">
             <a:avLst/>
@@ -7223,7 +6907,7 @@
             <a:r>
               <a:rPr sz="1600">
                 <a:solidFill>
-                  <a:srgbClr val="E74C3C"/>
+                  <a:srgbClr val="0078D4"/>
                 </a:solidFill>
                 <a:latin typeface="Segoe UI"/>
               </a:rPr>
@@ -7236,7 +6920,7 @@
                 </a:solidFill>
                 <a:latin typeface="Segoe UI"/>
               </a:rPr>
-              <a:t>learner can explain modes</a:t>
+              <a:t>Asking for too much at once</a:t>
             </a:r>
           </a:p>
           <a:p>
@@ -7251,7 +6935,7 @@
             <a:r>
               <a:rPr sz="1600">
                 <a:solidFill>
-                  <a:srgbClr val="E74C3C"/>
+                  <a:srgbClr val="0078D4"/>
                 </a:solidFill>
                 <a:latin typeface="Segoe UI"/>
               </a:rPr>
@@ -7264,7 +6948,7 @@
                 </a:solidFill>
                 <a:latin typeface="Segoe UI"/>
               </a:rPr>
-              <a:t>learner can improve prompt quality</a:t>
+              <a:t>Picking Agent too early</a:t>
             </a:r>
           </a:p>
           <a:p>
@@ -7279,7 +6963,7 @@
             <a:r>
               <a:rPr sz="1600">
                 <a:solidFill>
-                  <a:srgbClr val="E74C3C"/>
+                  <a:srgbClr val="0078D4"/>
                 </a:solidFill>
                 <a:latin typeface="Segoe UI"/>
               </a:rPr>
@@ -7292,148 +6976,70 @@
                 </a:solidFill>
                 <a:latin typeface="Segoe UI"/>
               </a:rPr>
-              <a:t>learner can state a review rule</a:t>
-            </a:r>
-          </a:p>
-        </p:txBody>
-      </p:sp>
-      <p:sp>
-        <p:nvSpPr>
-          <p:cNvPr id="8" name="Rounded Rectangle 7"/>
-          <p:cNvSpPr/>
-          <p:nvPr/>
-        </p:nvSpPr>
-        <p:spPr>
-          <a:xfrm>
-            <a:off x="8046720" y="1463040"/>
-            <a:ext cx="3840480" cy="1920240"/>
-          </a:xfrm>
-          <a:prstGeom prst="roundRect">
-            <a:avLst/>
-          </a:prstGeom>
-          <a:solidFill>
-            <a:srgbClr val="FDF2E9"/>
-          </a:solidFill>
-          <a:ln w="12700">
-            <a:solidFill>
-              <a:srgbClr val="E0C8A8"/>
-            </a:solidFill>
-          </a:ln>
-        </p:spPr>
-        <p:style>
-          <a:lnRef idx="1">
-            <a:schemeClr val="accent1"/>
-          </a:lnRef>
-          <a:fillRef idx="3">
-            <a:schemeClr val="accent1"/>
-          </a:fillRef>
-          <a:effectRef idx="2">
-            <a:schemeClr val="accent1"/>
-          </a:effectRef>
-          <a:fontRef idx="minor">
-            <a:schemeClr val="lt1"/>
-          </a:fontRef>
-        </p:style>
-        <p:txBody>
-          <a:bodyPr rtlCol="0" anchor="ctr"/>
-          <a:lstStyle/>
-          <a:p>
-            <a:pPr algn="ctr"/>
-          </a:p>
-        </p:txBody>
-      </p:sp>
-      <p:sp>
-        <p:nvSpPr>
-          <p:cNvPr id="9" name="TextBox 8"/>
-          <p:cNvSpPr txBox="1"/>
-          <p:nvPr/>
-        </p:nvSpPr>
-        <p:spPr>
-          <a:xfrm>
-            <a:off x="8229600" y="1554480"/>
-            <a:ext cx="3474720" cy="274320"/>
-          </a:xfrm>
-          <a:prstGeom prst="rect">
-            <a:avLst/>
-          </a:prstGeom>
-          <a:noFill/>
-        </p:spPr>
-        <p:txBody>
-          <a:bodyPr wrap="none">
-            <a:spAutoFit/>
-          </a:bodyPr>
-          <a:lstStyle/>
-          <a:p>
-            <a:r>
-              <a:rPr sz="900" b="1">
-                <a:solidFill>
-                  <a:srgbClr val="5D6D7E"/>
-                </a:solidFill>
-                <a:latin typeface="Segoe UI"/>
-              </a:rPr>
-              <a:t>PRESENTER NOTES</a:t>
-            </a:r>
-          </a:p>
-        </p:txBody>
-      </p:sp>
-      <p:sp>
-        <p:nvSpPr>
-          <p:cNvPr id="10" name="TextBox 9"/>
-          <p:cNvSpPr txBox="1"/>
-          <p:nvPr/>
-        </p:nvSpPr>
-        <p:spPr>
-          <a:xfrm>
-            <a:off x="8229600" y="1828800"/>
-            <a:ext cx="3474720" cy="1463040"/>
-          </a:xfrm>
-          <a:prstGeom prst="rect">
-            <a:avLst/>
-          </a:prstGeom>
-          <a:noFill/>
-        </p:spPr>
-        <p:txBody>
-          <a:bodyPr wrap="square">
-            <a:spAutoFit/>
-          </a:bodyPr>
-          <a:lstStyle/>
+              <a:t>Missing context</a:t>
+            </a:r>
+          </a:p>
           <a:p>
             <a:pPr>
+              <a:spcBef>
+                <a:spcPts val="400"/>
+              </a:spcBef>
               <a:spcAft>
-                <a:spcPts val="400"/>
+                <a:spcPts val="800"/>
               </a:spcAft>
             </a:pPr>
             <a:r>
-              <a:rPr sz="1100" i="1">
-                <a:solidFill>
-                  <a:srgbClr val="5D6D7E"/>
-                </a:solidFill>
-                <a:latin typeface="Segoe UI"/>
-              </a:rPr>
-              <a:t>Use this slide to confirm readiness for module 02.</a:t>
+              <a:rPr sz="1600">
+                <a:solidFill>
+                  <a:srgbClr val="0078D4"/>
+                </a:solidFill>
+                <a:latin typeface="Segoe UI"/>
+              </a:rPr>
+              <a:t>●  </a:t>
+            </a:r>
+            <a:r>
+              <a:rPr sz="1800">
+                <a:solidFill>
+                  <a:srgbClr val="2C3E50"/>
+                </a:solidFill>
+                <a:latin typeface="Segoe UI"/>
+              </a:rPr>
+              <a:t>Skipping review</a:t>
             </a:r>
           </a:p>
           <a:p>
             <a:pPr>
+              <a:spcBef>
+                <a:spcPts val="400"/>
+              </a:spcBef>
               <a:spcAft>
-                <a:spcPts val="400"/>
+                <a:spcPts val="800"/>
               </a:spcAft>
             </a:pPr>
             <a:r>
-              <a:rPr sz="1100" i="1">
-                <a:solidFill>
-                  <a:srgbClr val="5D6D7E"/>
-                </a:solidFill>
-                <a:latin typeface="Segoe UI"/>
-              </a:rPr>
-              <a:t>Point forward explicitly: module 02 turns these review habits into actual product setup and readiness checks.</a:t>
-            </a:r>
-          </a:p>
-        </p:txBody>
-      </p:sp>
-      <p:sp>
-        <p:nvSpPr>
-          <p:cNvPr id="11" name="Rectangle 10"/>
+              <a:rPr sz="1600">
+                <a:solidFill>
+                  <a:srgbClr val="0078D4"/>
+                </a:solidFill>
+                <a:latin typeface="Segoe UI"/>
+              </a:rPr>
+              <a:t>●  </a:t>
+            </a:r>
+            <a:r>
+              <a:rPr sz="1800">
+                <a:solidFill>
+                  <a:srgbClr val="2C3E50"/>
+                </a:solidFill>
+                <a:latin typeface="Segoe UI"/>
+              </a:rPr>
+              <a:t>Staying in one noisy session too long</a:t>
+            </a:r>
+          </a:p>
+        </p:txBody>
+      </p:sp>
+      <p:sp>
+        <p:nvSpPr>
+          <p:cNvPr id="8" name="Rectangle 7"/>
           <p:cNvSpPr/>
           <p:nvPr/>
         </p:nvSpPr>
@@ -7477,7 +7083,7 @@
                   <a:srgbClr val="FFFFFF"/>
                 </a:solidFill>
               </a:rPr>
-              <a:t>Beginner Best Practices For GitHub Copilot Agents In VS Code</a:t>
+              <a:t>Presenter Deck</a:t>
             </a:r>
           </a:p>
         </p:txBody>
@@ -7496,7 +7102,7 @@
     <p:bg>
       <p:bgPr>
         <a:solidFill>
-          <a:srgbClr val="0078D4"/>
+          <a:srgbClr val="FFFFFF"/>
         </a:solidFill>
         <a:effectLst/>
       </p:bgPr>
@@ -7510,20 +7116,20 @@
       <p:grpSpPr/>
       <p:sp>
         <p:nvSpPr>
-          <p:cNvPr id="2" name="Oval 1"/>
+          <p:cNvPr id="2" name="Rectangle 1"/>
           <p:cNvSpPr/>
           <p:nvPr/>
         </p:nvSpPr>
         <p:spPr>
           <a:xfrm>
-            <a:off x="-1828800" y="-1828800"/>
-            <a:ext cx="4572000" cy="4572000"/>
-          </a:xfrm>
-          <a:prstGeom prst="ellipse">
+            <a:off x="0" y="0"/>
+            <a:ext cx="12191695" cy="1097280"/>
+          </a:xfrm>
+          <a:prstGeom prst="rect">
             <a:avLst/>
           </a:prstGeom>
           <a:solidFill>
-            <a:srgbClr val="006ABE"/>
+            <a:srgbClr val="E74C3C"/>
           </a:solidFill>
           <a:ln>
             <a:noFill/>
@@ -7553,20 +7159,20 @@
       </p:sp>
       <p:sp>
         <p:nvSpPr>
-          <p:cNvPr id="3" name="Oval 2"/>
+          <p:cNvPr id="3" name="Rectangle 2"/>
           <p:cNvSpPr/>
           <p:nvPr/>
         </p:nvSpPr>
         <p:spPr>
           <a:xfrm>
-            <a:off x="9144000" y="3657600"/>
-            <a:ext cx="3657600" cy="3657600"/>
-          </a:xfrm>
-          <a:prstGeom prst="ellipse">
+            <a:off x="0" y="0"/>
+            <a:ext cx="73152" cy="6858000"/>
+          </a:xfrm>
+          <a:prstGeom prst="rect">
             <a:avLst/>
           </a:prstGeom>
           <a:solidFill>
-            <a:srgbClr val="006ABE"/>
+            <a:srgbClr val="E74C3C"/>
           </a:solidFill>
           <a:ln>
             <a:noFill/>
@@ -7602,8 +7208,8 @@
         </p:nvSpPr>
         <p:spPr>
           <a:xfrm>
-            <a:off x="1828800" y="2286000"/>
-            <a:ext cx="8229600" cy="1371600"/>
+            <a:off x="731520" y="228600"/>
+            <a:ext cx="9144000" cy="731520"/>
           </a:xfrm>
           <a:prstGeom prst="rect">
             <a:avLst/>
@@ -7616,29 +7222,72 @@
           </a:bodyPr>
           <a:lstStyle/>
           <a:p>
+            <a:pPr algn="l"/>
+            <a:r>
+              <a:rPr sz="2800" b="1">
+                <a:solidFill>
+                  <a:srgbClr val="FFFFFF"/>
+                </a:solidFill>
+                <a:latin typeface="Segoe UI"/>
+              </a:rPr>
+              <a:t>Validation And Reflection</a:t>
+            </a:r>
+          </a:p>
+        </p:txBody>
+      </p:sp>
+      <p:sp>
+        <p:nvSpPr>
+          <p:cNvPr id="5" name="Decision 4"/>
+          <p:cNvSpPr/>
+          <p:nvPr/>
+        </p:nvSpPr>
+        <p:spPr>
+          <a:xfrm>
+            <a:off x="10972800" y="274320"/>
+            <a:ext cx="548640" cy="548640"/>
+          </a:xfrm>
+          <a:prstGeom prst="flowChartDecision">
+            <a:avLst/>
+          </a:prstGeom>
+          <a:solidFill>
+            <a:srgbClr val="E74C3C"/>
+          </a:solidFill>
+          <a:ln>
+            <a:noFill/>
+          </a:ln>
+        </p:spPr>
+        <p:style>
+          <a:lnRef idx="1">
+            <a:schemeClr val="accent1"/>
+          </a:lnRef>
+          <a:fillRef idx="3">
+            <a:schemeClr val="accent1"/>
+          </a:fillRef>
+          <a:effectRef idx="2">
+            <a:schemeClr val="accent1"/>
+          </a:effectRef>
+          <a:fontRef idx="minor">
+            <a:schemeClr val="lt1"/>
+          </a:fontRef>
+        </p:style>
+        <p:txBody>
+          <a:bodyPr rtlCol="0" anchor="ctr"/>
+          <a:lstStyle/>
+          <a:p>
             <a:pPr algn="ctr"/>
-            <a:r>
-              <a:rPr sz="3600" b="1">
-                <a:solidFill>
-                  <a:srgbClr val="FFFFFF"/>
-                </a:solidFill>
-                <a:latin typeface="Segoe UI"/>
-              </a:rPr>
-              <a:t>Reflection</a:t>
-            </a:r>
-          </a:p>
-        </p:txBody>
-      </p:sp>
-      <p:sp>
-        <p:nvSpPr>
-          <p:cNvPr id="5" name="TextBox 4"/>
+          </a:p>
+        </p:txBody>
+      </p:sp>
+      <p:sp>
+        <p:nvSpPr>
+          <p:cNvPr id="6" name="TextBox 5"/>
           <p:cNvSpPr txBox="1"/>
           <p:nvPr/>
         </p:nvSpPr>
         <p:spPr>
           <a:xfrm>
-            <a:off x="1828800" y="3840480"/>
-            <a:ext cx="8229600" cy="731520"/>
+            <a:off x="10789920" y="228600"/>
+            <a:ext cx="1097280" cy="365760"/>
           </a:xfrm>
           <a:prstGeom prst="rect">
             <a:avLst/>
@@ -7651,15 +7300,201 @@
           </a:bodyPr>
           <a:lstStyle/>
           <a:p>
+            <a:pPr algn="r"/>
+            <a:r>
+              <a:rPr sz="1200" b="0">
+                <a:solidFill>
+                  <a:srgbClr val="FFFFFF"/>
+                </a:solidFill>
+                <a:latin typeface="Segoe UI"/>
+              </a:rPr>
+              <a:t>14</a:t>
+            </a:r>
+          </a:p>
+        </p:txBody>
+      </p:sp>
+      <p:sp>
+        <p:nvSpPr>
+          <p:cNvPr id="7" name="TextBox 6"/>
+          <p:cNvSpPr txBox="1"/>
+          <p:nvPr/>
+        </p:nvSpPr>
+        <p:spPr>
+          <a:xfrm>
+            <a:off x="731520" y="1463040"/>
+            <a:ext cx="10515600" cy="4114800"/>
+          </a:xfrm>
+          <a:prstGeom prst="rect">
+            <a:avLst/>
+          </a:prstGeom>
+          <a:noFill/>
+        </p:spPr>
+        <p:txBody>
+          <a:bodyPr wrap="square">
+            <a:spAutoFit/>
+          </a:bodyPr>
+          <a:lstStyle/>
+          <a:p>
+            <a:pPr>
+              <a:spcBef>
+                <a:spcPts val="400"/>
+              </a:spcBef>
+              <a:spcAft>
+                <a:spcPts val="800"/>
+              </a:spcAft>
+            </a:pPr>
+            <a:r>
+              <a:rPr sz="1600">
+                <a:solidFill>
+                  <a:srgbClr val="E74C3C"/>
+                </a:solidFill>
+                <a:latin typeface="Segoe UI"/>
+              </a:rPr>
+              <a:t>●  </a:t>
+            </a:r>
+            <a:r>
+              <a:rPr sz="1800">
+                <a:solidFill>
+                  <a:srgbClr val="2C3E50"/>
+                </a:solidFill>
+                <a:latin typeface="Segoe UI"/>
+              </a:rPr>
+              <a:t>Can you choose Ask vs Edit vs Plan vs Agent?</a:t>
+            </a:r>
+          </a:p>
+          <a:p>
+            <a:pPr>
+              <a:spcBef>
+                <a:spcPts val="400"/>
+              </a:spcBef>
+              <a:spcAft>
+                <a:spcPts val="800"/>
+              </a:spcAft>
+            </a:pPr>
+            <a:r>
+              <a:rPr sz="1600">
+                <a:solidFill>
+                  <a:srgbClr val="E74C3C"/>
+                </a:solidFill>
+                <a:latin typeface="Segoe UI"/>
+              </a:rPr>
+              <a:t>●  </a:t>
+            </a:r>
+            <a:r>
+              <a:rPr sz="1800">
+                <a:solidFill>
+                  <a:srgbClr val="2C3E50"/>
+                </a:solidFill>
+                <a:latin typeface="Segoe UI"/>
+              </a:rPr>
+              <a:t>Can you refine a vague prompt?</a:t>
+            </a:r>
+          </a:p>
+          <a:p>
+            <a:pPr>
+              <a:spcBef>
+                <a:spcPts val="400"/>
+              </a:spcBef>
+              <a:spcAft>
+                <a:spcPts val="800"/>
+              </a:spcAft>
+            </a:pPr>
+            <a:r>
+              <a:rPr sz="1600">
+                <a:solidFill>
+                  <a:srgbClr val="E74C3C"/>
+                </a:solidFill>
+                <a:latin typeface="Segoe UI"/>
+              </a:rPr>
+              <a:t>●  </a:t>
+            </a:r>
+            <a:r>
+              <a:rPr sz="1800">
+                <a:solidFill>
+                  <a:srgbClr val="2C3E50"/>
+                </a:solidFill>
+                <a:latin typeface="Segoe UI"/>
+              </a:rPr>
+              <a:t>Can you name what still needs verification?</a:t>
+            </a:r>
+          </a:p>
+          <a:p>
+            <a:pPr>
+              <a:spcBef>
+                <a:spcPts val="400"/>
+              </a:spcBef>
+              <a:spcAft>
+                <a:spcPts val="800"/>
+              </a:spcAft>
+            </a:pPr>
+            <a:r>
+              <a:rPr sz="1600">
+                <a:solidFill>
+                  <a:srgbClr val="E74C3C"/>
+                </a:solidFill>
+                <a:latin typeface="Segoe UI"/>
+              </a:rPr>
+              <a:t>●  </a:t>
+            </a:r>
+            <a:r>
+              <a:rPr sz="1800">
+                <a:solidFill>
+                  <a:srgbClr val="2C3E50"/>
+                </a:solidFill>
+                <a:latin typeface="Segoe UI"/>
+              </a:rPr>
+              <a:t>Which team habit should become an instruction?</a:t>
+            </a:r>
+          </a:p>
+        </p:txBody>
+      </p:sp>
+      <p:sp>
+        <p:nvSpPr>
+          <p:cNvPr id="8" name="Rectangle 7"/>
+          <p:cNvSpPr/>
+          <p:nvPr/>
+        </p:nvSpPr>
+        <p:spPr>
+          <a:xfrm>
+            <a:off x="0" y="6446520"/>
+            <a:ext cx="12191695" cy="411480"/>
+          </a:xfrm>
+          <a:prstGeom prst="rect">
+            <a:avLst/>
+          </a:prstGeom>
+          <a:solidFill>
+            <a:srgbClr val="1B3A5C"/>
+          </a:solidFill>
+          <a:ln>
+            <a:noFill/>
+          </a:ln>
+        </p:spPr>
+        <p:style>
+          <a:lnRef idx="1">
+            <a:schemeClr val="accent1"/>
+          </a:lnRef>
+          <a:fillRef idx="3">
+            <a:schemeClr val="accent1"/>
+          </a:fillRef>
+          <a:effectRef idx="2">
+            <a:schemeClr val="accent1"/>
+          </a:effectRef>
+          <a:fontRef idx="minor">
+            <a:schemeClr val="lt1"/>
+          </a:fontRef>
+        </p:style>
+        <p:txBody>
+          <a:bodyPr rtlCol="0" anchor="ctr" wrap="square"/>
+          <a:lstStyle/>
+          <a:p>
             <a:pPr algn="ctr"/>
             <a:r>
-              <a:rPr sz="1800" b="0">
-                <a:solidFill>
-                  <a:srgbClr val="D6EAF8"/>
-                </a:solidFill>
-                <a:latin typeface="Segoe UI"/>
-              </a:rPr>
-              <a:t>What did you learn?</a:t>
+              <a:rPr sz="1000">
+                <a:solidFill>
+                  <a:srgbClr val="FFFFFF"/>
+                </a:solidFill>
+              </a:rPr>
+              <a:t>Presenter Deck</a:t>
             </a:r>
           </a:p>
         </p:txBody>
@@ -7705,7 +7540,7 @@
             <a:avLst/>
           </a:prstGeom>
           <a:solidFill>
-            <a:srgbClr val="1B3A5C"/>
+            <a:srgbClr val="5D6D7E"/>
           </a:solidFill>
           <a:ln>
             <a:noFill/>
@@ -7748,7 +7583,7 @@
             <a:avLst/>
           </a:prstGeom>
           <a:solidFill>
-            <a:srgbClr val="1B3A5C"/>
+            <a:srgbClr val="5D6D7E"/>
           </a:solidFill>
           <a:ln>
             <a:noFill/>
@@ -7806,14 +7641,14 @@
                 </a:solidFill>
                 <a:latin typeface="Segoe UI"/>
               </a:rPr>
-              <a:t>Reflection</a:t>
-            </a:r>
-          </a:p>
-        </p:txBody>
-      </p:sp>
-      <p:sp>
-        <p:nvSpPr>
-          <p:cNvPr id="5" name="Cloud 4"/>
+              <a:t>References</a:t>
+            </a:r>
+          </a:p>
+        </p:txBody>
+      </p:sp>
+      <p:sp>
+        <p:nvSpPr>
+          <p:cNvPr id="5" name="Folded Corner 4"/>
           <p:cNvSpPr/>
           <p:nvPr/>
         </p:nvSpPr>
@@ -7822,11 +7657,11 @@
             <a:off x="10972800" y="274320"/>
             <a:ext cx="548640" cy="548640"/>
           </a:xfrm>
-          <a:prstGeom prst="cloud">
+          <a:prstGeom prst="foldedCorner">
             <a:avLst/>
           </a:prstGeom>
           <a:solidFill>
-            <a:srgbClr val="1B3A5C"/>
+            <a:srgbClr val="5D6D7E"/>
           </a:solidFill>
           <a:ln>
             <a:noFill/>
@@ -7884,7 +7719,7 @@
                 </a:solidFill>
                 <a:latin typeface="Segoe UI"/>
               </a:rPr>
-              <a:t>14</a:t>
+              <a:t>15</a:t>
             </a:r>
           </a:p>
         </p:txBody>
@@ -7898,7 +7733,7 @@
         <p:spPr>
           <a:xfrm>
             <a:off x="731520" y="1463040"/>
-            <a:ext cx="6858000" cy="4114800"/>
+            <a:ext cx="10515600" cy="4114800"/>
           </a:xfrm>
           <a:prstGeom prst="rect">
             <a:avLst/>
@@ -7922,7 +7757,7 @@
             <a:r>
               <a:rPr sz="1600">
                 <a:solidFill>
-                  <a:srgbClr val="1B3A5C"/>
+                  <a:srgbClr val="5D6D7E"/>
                 </a:solidFill>
                 <a:latin typeface="Segoe UI"/>
               </a:rPr>
@@ -7935,7 +7770,7 @@
                 </a:solidFill>
                 <a:latin typeface="Segoe UI"/>
               </a:rPr>
-              <a:t>what guardrail matters most?</a:t>
+              <a:t>Shared reference file in `references/`</a:t>
             </a:r>
           </a:p>
           <a:p>
@@ -7950,7 +7785,7 @@
             <a:r>
               <a:rPr sz="1600">
                 <a:solidFill>
-                  <a:srgbClr val="1B3A5C"/>
+                  <a:srgbClr val="5D6D7E"/>
                 </a:solidFill>
                 <a:latin typeface="Segoe UI"/>
               </a:rPr>
@@ -7963,132 +7798,42 @@
                 </a:solidFill>
                 <a:latin typeface="Segoe UI"/>
               </a:rPr>
-              <a:t>what mistake is most likely in your team?</a:t>
-            </a:r>
-          </a:p>
-        </p:txBody>
-      </p:sp>
-      <p:sp>
-        <p:nvSpPr>
-          <p:cNvPr id="8" name="Rounded Rectangle 7"/>
-          <p:cNvSpPr/>
-          <p:nvPr/>
-        </p:nvSpPr>
-        <p:spPr>
-          <a:xfrm>
-            <a:off x="8046720" y="1463040"/>
-            <a:ext cx="3840480" cy="1417320"/>
-          </a:xfrm>
-          <a:prstGeom prst="roundRect">
-            <a:avLst/>
-          </a:prstGeom>
-          <a:solidFill>
-            <a:srgbClr val="FDF2E9"/>
-          </a:solidFill>
-          <a:ln w="12700">
-            <a:solidFill>
-              <a:srgbClr val="E0C8A8"/>
-            </a:solidFill>
-          </a:ln>
-        </p:spPr>
-        <p:style>
-          <a:lnRef idx="1">
-            <a:schemeClr val="accent1"/>
-          </a:lnRef>
-          <a:fillRef idx="3">
-            <a:schemeClr val="accent1"/>
-          </a:fillRef>
-          <a:effectRef idx="2">
-            <a:schemeClr val="accent1"/>
-          </a:effectRef>
-          <a:fontRef idx="minor">
-            <a:schemeClr val="lt1"/>
-          </a:fontRef>
-        </p:style>
-        <p:txBody>
-          <a:bodyPr rtlCol="0" anchor="ctr"/>
-          <a:lstStyle/>
-          <a:p>
-            <a:pPr algn="ctr"/>
-          </a:p>
-        </p:txBody>
-      </p:sp>
-      <p:sp>
-        <p:nvSpPr>
-          <p:cNvPr id="9" name="TextBox 8"/>
-          <p:cNvSpPr txBox="1"/>
-          <p:nvPr/>
-        </p:nvSpPr>
-        <p:spPr>
-          <a:xfrm>
-            <a:off x="8229600" y="1554480"/>
-            <a:ext cx="3474720" cy="274320"/>
-          </a:xfrm>
-          <a:prstGeom prst="rect">
-            <a:avLst/>
-          </a:prstGeom>
-          <a:noFill/>
-        </p:spPr>
-        <p:txBody>
-          <a:bodyPr wrap="none">
-            <a:spAutoFit/>
-          </a:bodyPr>
-          <a:lstStyle/>
-          <a:p>
-            <a:r>
-              <a:rPr sz="900" b="1">
-                <a:solidFill>
-                  <a:srgbClr val="5D6D7E"/>
-                </a:solidFill>
-                <a:latin typeface="Segoe UI"/>
-              </a:rPr>
-              <a:t>PRESENTER NOTES</a:t>
-            </a:r>
-          </a:p>
-        </p:txBody>
-      </p:sp>
-      <p:sp>
-        <p:nvSpPr>
-          <p:cNvPr id="10" name="TextBox 9"/>
-          <p:cNvSpPr txBox="1"/>
-          <p:nvPr/>
-        </p:nvSpPr>
-        <p:spPr>
-          <a:xfrm>
-            <a:off x="8229600" y="1828800"/>
-            <a:ext cx="3474720" cy="960120"/>
-          </a:xfrm>
-          <a:prstGeom prst="rect">
-            <a:avLst/>
-          </a:prstGeom>
-          <a:noFill/>
-        </p:spPr>
-        <p:txBody>
-          <a:bodyPr wrap="square">
-            <a:spAutoFit/>
-          </a:bodyPr>
-          <a:lstStyle/>
+              <a:t>Official GitHub Docs</a:t>
+            </a:r>
+          </a:p>
           <a:p>
             <a:pPr>
+              <a:spcBef>
+                <a:spcPts val="400"/>
+              </a:spcBef>
               <a:spcAft>
-                <a:spcPts val="400"/>
+                <a:spcPts val="800"/>
               </a:spcAft>
             </a:pPr>
             <a:r>
-              <a:rPr sz="1100" i="1">
+              <a:rPr sz="1600">
                 <a:solidFill>
                   <a:srgbClr val="5D6D7E"/>
                 </a:solidFill>
                 <a:latin typeface="Segoe UI"/>
               </a:rPr>
-              <a:t>Ask learners to answer from their real BI, DS, or DE workflows.</a:t>
-            </a:r>
-          </a:p>
-        </p:txBody>
-      </p:sp>
-      <p:sp>
-        <p:nvSpPr>
-          <p:cNvPr id="11" name="Rectangle 10"/>
+              <a:t>●  </a:t>
+            </a:r>
+            <a:r>
+              <a:rPr sz="1800">
+                <a:solidFill>
+                  <a:srgbClr val="2C3E50"/>
+                </a:solidFill>
+                <a:latin typeface="Segoe UI"/>
+              </a:rPr>
+              <a:t>Official VS Code Docs</a:t>
+            </a:r>
+          </a:p>
+        </p:txBody>
+      </p:sp>
+      <p:sp>
+        <p:nvSpPr>
+          <p:cNvPr id="8" name="Rectangle 7"/>
           <p:cNvSpPr/>
           <p:nvPr/>
         </p:nvSpPr>
@@ -8132,7 +7877,7 @@
                   <a:srgbClr val="FFFFFF"/>
                 </a:solidFill>
               </a:rPr>
-              <a:t>Beginner Best Practices For GitHub Copilot Agents In VS Code</a:t>
+              <a:t>Presenter Deck</a:t>
             </a:r>
           </a:p>
         </p:txBody>
@@ -8146,535 +7891,6 @@
 </file>
 
 <file path=ppt/slides/slide18.xml><?xml version="1.0" encoding="utf-8"?>
-<p:sld xmlns:a="http://schemas.openxmlformats.org/drawingml/2006/main" xmlns:p="http://schemas.openxmlformats.org/presentationml/2006/main" xmlns:r="http://schemas.openxmlformats.org/officeDocument/2006/relationships">
-  <p:cSld>
-    <p:bg>
-      <p:bgPr>
-        <a:solidFill>
-          <a:srgbClr val="FFFFFF"/>
-        </a:solidFill>
-        <a:effectLst/>
-      </p:bgPr>
-    </p:bg>
-    <p:spTree>
-      <p:nvGrpSpPr>
-        <p:cNvPr id="1" name=""/>
-        <p:cNvGrpSpPr/>
-        <p:nvPr/>
-      </p:nvGrpSpPr>
-      <p:grpSpPr/>
-      <p:sp>
-        <p:nvSpPr>
-          <p:cNvPr id="2" name="Rectangle 1"/>
-          <p:cNvSpPr/>
-          <p:nvPr/>
-        </p:nvSpPr>
-        <p:spPr>
-          <a:xfrm>
-            <a:off x="0" y="0"/>
-            <a:ext cx="12191695" cy="1097280"/>
-          </a:xfrm>
-          <a:prstGeom prst="rect">
-            <a:avLst/>
-          </a:prstGeom>
-          <a:solidFill>
-            <a:srgbClr val="5D6D7E"/>
-          </a:solidFill>
-          <a:ln>
-            <a:noFill/>
-          </a:ln>
-        </p:spPr>
-        <p:style>
-          <a:lnRef idx="1">
-            <a:schemeClr val="accent1"/>
-          </a:lnRef>
-          <a:fillRef idx="3">
-            <a:schemeClr val="accent1"/>
-          </a:fillRef>
-          <a:effectRef idx="2">
-            <a:schemeClr val="accent1"/>
-          </a:effectRef>
-          <a:fontRef idx="minor">
-            <a:schemeClr val="lt1"/>
-          </a:fontRef>
-        </p:style>
-        <p:txBody>
-          <a:bodyPr rtlCol="0" anchor="ctr"/>
-          <a:lstStyle/>
-          <a:p>
-            <a:pPr algn="ctr"/>
-          </a:p>
-        </p:txBody>
-      </p:sp>
-      <p:sp>
-        <p:nvSpPr>
-          <p:cNvPr id="3" name="Rectangle 2"/>
-          <p:cNvSpPr/>
-          <p:nvPr/>
-        </p:nvSpPr>
-        <p:spPr>
-          <a:xfrm>
-            <a:off x="0" y="0"/>
-            <a:ext cx="73152" cy="6858000"/>
-          </a:xfrm>
-          <a:prstGeom prst="rect">
-            <a:avLst/>
-          </a:prstGeom>
-          <a:solidFill>
-            <a:srgbClr val="5D6D7E"/>
-          </a:solidFill>
-          <a:ln>
-            <a:noFill/>
-          </a:ln>
-        </p:spPr>
-        <p:style>
-          <a:lnRef idx="1">
-            <a:schemeClr val="accent1"/>
-          </a:lnRef>
-          <a:fillRef idx="3">
-            <a:schemeClr val="accent1"/>
-          </a:fillRef>
-          <a:effectRef idx="2">
-            <a:schemeClr val="accent1"/>
-          </a:effectRef>
-          <a:fontRef idx="minor">
-            <a:schemeClr val="lt1"/>
-          </a:fontRef>
-        </p:style>
-        <p:txBody>
-          <a:bodyPr rtlCol="0" anchor="ctr"/>
-          <a:lstStyle/>
-          <a:p>
-            <a:pPr algn="ctr"/>
-          </a:p>
-        </p:txBody>
-      </p:sp>
-      <p:sp>
-        <p:nvSpPr>
-          <p:cNvPr id="4" name="TextBox 3"/>
-          <p:cNvSpPr txBox="1"/>
-          <p:nvPr/>
-        </p:nvSpPr>
-        <p:spPr>
-          <a:xfrm>
-            <a:off x="731520" y="228600"/>
-            <a:ext cx="9144000" cy="731520"/>
-          </a:xfrm>
-          <a:prstGeom prst="rect">
-            <a:avLst/>
-          </a:prstGeom>
-          <a:noFill/>
-        </p:spPr>
-        <p:txBody>
-          <a:bodyPr wrap="square">
-            <a:spAutoFit/>
-          </a:bodyPr>
-          <a:lstStyle/>
-          <a:p>
-            <a:pPr algn="l"/>
-            <a:r>
-              <a:rPr sz="2800" b="1">
-                <a:solidFill>
-                  <a:srgbClr val="FFFFFF"/>
-                </a:solidFill>
-                <a:latin typeface="Segoe UI"/>
-              </a:rPr>
-              <a:t>References</a:t>
-            </a:r>
-          </a:p>
-        </p:txBody>
-      </p:sp>
-      <p:sp>
-        <p:nvSpPr>
-          <p:cNvPr id="5" name="Folded Corner 4"/>
-          <p:cNvSpPr/>
-          <p:nvPr/>
-        </p:nvSpPr>
-        <p:spPr>
-          <a:xfrm>
-            <a:off x="10972800" y="274320"/>
-            <a:ext cx="548640" cy="548640"/>
-          </a:xfrm>
-          <a:prstGeom prst="foldedCorner">
-            <a:avLst/>
-          </a:prstGeom>
-          <a:solidFill>
-            <a:srgbClr val="5D6D7E"/>
-          </a:solidFill>
-          <a:ln>
-            <a:noFill/>
-          </a:ln>
-        </p:spPr>
-        <p:style>
-          <a:lnRef idx="1">
-            <a:schemeClr val="accent1"/>
-          </a:lnRef>
-          <a:fillRef idx="3">
-            <a:schemeClr val="accent1"/>
-          </a:fillRef>
-          <a:effectRef idx="2">
-            <a:schemeClr val="accent1"/>
-          </a:effectRef>
-          <a:fontRef idx="minor">
-            <a:schemeClr val="lt1"/>
-          </a:fontRef>
-        </p:style>
-        <p:txBody>
-          <a:bodyPr rtlCol="0" anchor="ctr"/>
-          <a:lstStyle/>
-          <a:p>
-            <a:pPr algn="ctr"/>
-          </a:p>
-        </p:txBody>
-      </p:sp>
-      <p:sp>
-        <p:nvSpPr>
-          <p:cNvPr id="6" name="TextBox 5"/>
-          <p:cNvSpPr txBox="1"/>
-          <p:nvPr/>
-        </p:nvSpPr>
-        <p:spPr>
-          <a:xfrm>
-            <a:off x="10789920" y="228600"/>
-            <a:ext cx="1097280" cy="365760"/>
-          </a:xfrm>
-          <a:prstGeom prst="rect">
-            <a:avLst/>
-          </a:prstGeom>
-          <a:noFill/>
-        </p:spPr>
-        <p:txBody>
-          <a:bodyPr wrap="square">
-            <a:spAutoFit/>
-          </a:bodyPr>
-          <a:lstStyle/>
-          <a:p>
-            <a:pPr algn="r"/>
-            <a:r>
-              <a:rPr sz="1200" b="0">
-                <a:solidFill>
-                  <a:srgbClr val="FFFFFF"/>
-                </a:solidFill>
-                <a:latin typeface="Segoe UI"/>
-              </a:rPr>
-              <a:t>15</a:t>
-            </a:r>
-          </a:p>
-        </p:txBody>
-      </p:sp>
-      <p:sp>
-        <p:nvSpPr>
-          <p:cNvPr id="7" name="TextBox 6"/>
-          <p:cNvSpPr txBox="1"/>
-          <p:nvPr/>
-        </p:nvSpPr>
-        <p:spPr>
-          <a:xfrm>
-            <a:off x="731520" y="1463040"/>
-            <a:ext cx="6858000" cy="4114800"/>
-          </a:xfrm>
-          <a:prstGeom prst="rect">
-            <a:avLst/>
-          </a:prstGeom>
-          <a:noFill/>
-        </p:spPr>
-        <p:txBody>
-          <a:bodyPr wrap="square">
-            <a:spAutoFit/>
-          </a:bodyPr>
-          <a:lstStyle/>
-          <a:p>
-            <a:pPr>
-              <a:spcBef>
-                <a:spcPts val="400"/>
-              </a:spcBef>
-              <a:spcAft>
-                <a:spcPts val="800"/>
-              </a:spcAft>
-            </a:pPr>
-            <a:r>
-              <a:rPr sz="1600">
-                <a:solidFill>
-                  <a:srgbClr val="5D6D7E"/>
-                </a:solidFill>
-                <a:latin typeface="Segoe UI"/>
-              </a:rPr>
-              <a:t>●  </a:t>
-            </a:r>
-            <a:r>
-              <a:rPr sz="1800">
-                <a:solidFill>
-                  <a:srgbClr val="2C3E50"/>
-                </a:solidFill>
-                <a:latin typeface="Segoe UI"/>
-              </a:rPr>
-              <a:t>VS Code Copilot overview</a:t>
-            </a:r>
-          </a:p>
-          <a:p>
-            <a:pPr>
-              <a:spcBef>
-                <a:spcPts val="400"/>
-              </a:spcBef>
-              <a:spcAft>
-                <a:spcPts val="800"/>
-              </a:spcAft>
-            </a:pPr>
-            <a:r>
-              <a:rPr sz="1600">
-                <a:solidFill>
-                  <a:srgbClr val="5D6D7E"/>
-                </a:solidFill>
-                <a:latin typeface="Segoe UI"/>
-              </a:rPr>
-              <a:t>●  </a:t>
-            </a:r>
-            <a:r>
-              <a:rPr sz="1800">
-                <a:solidFill>
-                  <a:srgbClr val="2C3E50"/>
-                </a:solidFill>
-                <a:latin typeface="Segoe UI"/>
-              </a:rPr>
-              <a:t>VS Code AI best practices</a:t>
-            </a:r>
-          </a:p>
-          <a:p>
-            <a:pPr>
-              <a:spcBef>
-                <a:spcPts val="400"/>
-              </a:spcBef>
-              <a:spcAft>
-                <a:spcPts val="800"/>
-              </a:spcAft>
-            </a:pPr>
-            <a:r>
-              <a:rPr sz="1600">
-                <a:solidFill>
-                  <a:srgbClr val="5D6D7E"/>
-                </a:solidFill>
-                <a:latin typeface="Segoe UI"/>
-              </a:rPr>
-              <a:t>●  </a:t>
-            </a:r>
-            <a:r>
-              <a:rPr sz="1800">
-                <a:solidFill>
-                  <a:srgbClr val="2C3E50"/>
-                </a:solidFill>
-                <a:latin typeface="Segoe UI"/>
-              </a:rPr>
-              <a:t>VS Code agents tutorial</a:t>
-            </a:r>
-          </a:p>
-          <a:p>
-            <a:pPr>
-              <a:spcBef>
-                <a:spcPts val="400"/>
-              </a:spcBef>
-              <a:spcAft>
-                <a:spcPts val="800"/>
-              </a:spcAft>
-            </a:pPr>
-            <a:r>
-              <a:rPr sz="1600">
-                <a:solidFill>
-                  <a:srgbClr val="5D6D7E"/>
-                </a:solidFill>
-                <a:latin typeface="Segoe UI"/>
-              </a:rPr>
-              <a:t>●  </a:t>
-            </a:r>
-            <a:r>
-              <a:rPr sz="1800">
-                <a:solidFill>
-                  <a:srgbClr val="2C3E50"/>
-                </a:solidFill>
-                <a:latin typeface="Segoe UI"/>
-              </a:rPr>
-              <a:t>Workspace reference: references/copilot-agent-beginner-best-practices.md</a:t>
-            </a:r>
-          </a:p>
-        </p:txBody>
-      </p:sp>
-      <p:sp>
-        <p:nvSpPr>
-          <p:cNvPr id="8" name="Rounded Rectangle 7"/>
-          <p:cNvSpPr/>
-          <p:nvPr/>
-        </p:nvSpPr>
-        <p:spPr>
-          <a:xfrm>
-            <a:off x="8046720" y="1463040"/>
-            <a:ext cx="3840480" cy="1417320"/>
-          </a:xfrm>
-          <a:prstGeom prst="roundRect">
-            <a:avLst/>
-          </a:prstGeom>
-          <a:solidFill>
-            <a:srgbClr val="FDF2E9"/>
-          </a:solidFill>
-          <a:ln w="12700">
-            <a:solidFill>
-              <a:srgbClr val="E0C8A8"/>
-            </a:solidFill>
-          </a:ln>
-        </p:spPr>
-        <p:style>
-          <a:lnRef idx="1">
-            <a:schemeClr val="accent1"/>
-          </a:lnRef>
-          <a:fillRef idx="3">
-            <a:schemeClr val="accent1"/>
-          </a:fillRef>
-          <a:effectRef idx="2">
-            <a:schemeClr val="accent1"/>
-          </a:effectRef>
-          <a:fontRef idx="minor">
-            <a:schemeClr val="lt1"/>
-          </a:fontRef>
-        </p:style>
-        <p:txBody>
-          <a:bodyPr rtlCol="0" anchor="ctr"/>
-          <a:lstStyle/>
-          <a:p>
-            <a:pPr algn="ctr"/>
-          </a:p>
-        </p:txBody>
-      </p:sp>
-      <p:sp>
-        <p:nvSpPr>
-          <p:cNvPr id="9" name="TextBox 8"/>
-          <p:cNvSpPr txBox="1"/>
-          <p:nvPr/>
-        </p:nvSpPr>
-        <p:spPr>
-          <a:xfrm>
-            <a:off x="8229600" y="1554480"/>
-            <a:ext cx="3474720" cy="274320"/>
-          </a:xfrm>
-          <a:prstGeom prst="rect">
-            <a:avLst/>
-          </a:prstGeom>
-          <a:noFill/>
-        </p:spPr>
-        <p:txBody>
-          <a:bodyPr wrap="none">
-            <a:spAutoFit/>
-          </a:bodyPr>
-          <a:lstStyle/>
-          <a:p>
-            <a:r>
-              <a:rPr sz="900" b="1">
-                <a:solidFill>
-                  <a:srgbClr val="5D6D7E"/>
-                </a:solidFill>
-                <a:latin typeface="Segoe UI"/>
-              </a:rPr>
-              <a:t>PRESENTER NOTES</a:t>
-            </a:r>
-          </a:p>
-        </p:txBody>
-      </p:sp>
-      <p:sp>
-        <p:nvSpPr>
-          <p:cNvPr id="10" name="TextBox 9"/>
-          <p:cNvSpPr txBox="1"/>
-          <p:nvPr/>
-        </p:nvSpPr>
-        <p:spPr>
-          <a:xfrm>
-            <a:off x="8229600" y="1828800"/>
-            <a:ext cx="3474720" cy="960120"/>
-          </a:xfrm>
-          <a:prstGeom prst="rect">
-            <a:avLst/>
-          </a:prstGeom>
-          <a:noFill/>
-        </p:spPr>
-        <p:txBody>
-          <a:bodyPr wrap="square">
-            <a:spAutoFit/>
-          </a:bodyPr>
-          <a:lstStyle/>
-          <a:p>
-            <a:pPr>
-              <a:spcAft>
-                <a:spcPts val="400"/>
-              </a:spcAft>
-            </a:pPr>
-            <a:r>
-              <a:rPr sz="1100" i="1">
-                <a:solidFill>
-                  <a:srgbClr val="5D6D7E"/>
-                </a:solidFill>
-                <a:latin typeface="Segoe UI"/>
-              </a:rPr>
-              <a:t>Show the workspace reference file and explain that it translates the official docs into the local beginner baseline.</a:t>
-            </a:r>
-          </a:p>
-        </p:txBody>
-      </p:sp>
-      <p:sp>
-        <p:nvSpPr>
-          <p:cNvPr id="11" name="Rectangle 10"/>
-          <p:cNvSpPr/>
-          <p:nvPr/>
-        </p:nvSpPr>
-        <p:spPr>
-          <a:xfrm>
-            <a:off x="0" y="6446520"/>
-            <a:ext cx="12191695" cy="411480"/>
-          </a:xfrm>
-          <a:prstGeom prst="rect">
-            <a:avLst/>
-          </a:prstGeom>
-          <a:solidFill>
-            <a:srgbClr val="1B3A5C"/>
-          </a:solidFill>
-          <a:ln>
-            <a:noFill/>
-          </a:ln>
-        </p:spPr>
-        <p:style>
-          <a:lnRef idx="1">
-            <a:schemeClr val="accent1"/>
-          </a:lnRef>
-          <a:fillRef idx="3">
-            <a:schemeClr val="accent1"/>
-          </a:fillRef>
-          <a:effectRef idx="2">
-            <a:schemeClr val="accent1"/>
-          </a:effectRef>
-          <a:fontRef idx="minor">
-            <a:schemeClr val="lt1"/>
-          </a:fontRef>
-        </p:style>
-        <p:txBody>
-          <a:bodyPr rtlCol="0" anchor="ctr" wrap="square"/>
-          <a:lstStyle/>
-          <a:p>
-            <a:pPr algn="ctr"/>
-            <a:r>
-              <a:rPr sz="1000">
-                <a:solidFill>
-                  <a:srgbClr val="FFFFFF"/>
-                </a:solidFill>
-              </a:rPr>
-              <a:t>Beginner Best Practices For GitHub Copilot Agents In VS Code</a:t>
-            </a:r>
-          </a:p>
-        </p:txBody>
-      </p:sp>
-    </p:spTree>
-  </p:cSld>
-  <p:clrMapOvr>
-    <a:masterClrMapping/>
-  </p:clrMapOvr>
-</p:sld>
-</file>
-
-<file path=ppt/slides/slide19.xml><?xml version="1.0" encoding="utf-8"?>
 <p:sld xmlns:a="http://schemas.openxmlformats.org/drawingml/2006/main" xmlns:p="http://schemas.openxmlformats.org/presentationml/2006/main" xmlns:r="http://schemas.openxmlformats.org/officeDocument/2006/relationships">
   <p:cSld>
     <p:bg>
@@ -8800,7 +8016,7 @@
                 </a:solidFill>
                 <a:latin typeface="Segoe UI"/>
               </a:rPr>
-              <a:t>Beginner Best Practices For GitHub Copilot Agents In VS Code</a:t>
+              <a:t>Presenter Deck</a:t>
             </a:r>
           </a:p>
         </p:txBody>
@@ -9025,7 +8241,7 @@
                 </a:solidFill>
                 <a:latin typeface="Segoe UI"/>
               </a:rPr>
-              <a:t>Title</a:t>
+              <a:t>Beginner Best Practices For GitHub Copilot Agents In VS Code</a:t>
             </a:r>
           </a:p>
         </p:txBody>
@@ -9117,7 +8333,7 @@
         <p:spPr>
           <a:xfrm>
             <a:off x="731520" y="1463040"/>
-            <a:ext cx="6858000" cy="4114800"/>
+            <a:ext cx="10515600" cy="4114800"/>
           </a:xfrm>
           <a:prstGeom prst="rect">
             <a:avLst/>
@@ -9154,7 +8370,7 @@
                 </a:solidFill>
                 <a:latin typeface="Segoe UI"/>
               </a:rPr>
-              <a:t>Beginner Best Practices For GitHub Copilot Agents In VS Code</a:t>
+              <a:t>Audience: BI, DS, and DE practitioners</a:t>
             </a:r>
           </a:p>
           <a:p>
@@ -9182,148 +8398,42 @@
                 </a:solidFill>
                 <a:latin typeface="Segoe UI"/>
               </a:rPr>
-              <a:t>Foundation module for BI, DS, and DE teams</a:t>
-            </a:r>
-          </a:p>
-        </p:txBody>
-      </p:sp>
-      <p:sp>
-        <p:nvSpPr>
-          <p:cNvPr id="8" name="Rounded Rectangle 7"/>
-          <p:cNvSpPr/>
-          <p:nvPr/>
-        </p:nvSpPr>
-        <p:spPr>
-          <a:xfrm>
-            <a:off x="8046720" y="1463040"/>
-            <a:ext cx="3840480" cy="1920240"/>
-          </a:xfrm>
-          <a:prstGeom prst="roundRect">
-            <a:avLst/>
-          </a:prstGeom>
-          <a:solidFill>
-            <a:srgbClr val="FDF2E9"/>
-          </a:solidFill>
-          <a:ln w="12700">
-            <a:solidFill>
-              <a:srgbClr val="E0C8A8"/>
-            </a:solidFill>
-          </a:ln>
-        </p:spPr>
-        <p:style>
-          <a:lnRef idx="1">
-            <a:schemeClr val="accent1"/>
-          </a:lnRef>
-          <a:fillRef idx="3">
-            <a:schemeClr val="accent1"/>
-          </a:fillRef>
-          <a:effectRef idx="2">
-            <a:schemeClr val="accent1"/>
-          </a:effectRef>
-          <a:fontRef idx="minor">
-            <a:schemeClr val="lt1"/>
-          </a:fontRef>
-        </p:style>
-        <p:txBody>
-          <a:bodyPr rtlCol="0" anchor="ctr"/>
-          <a:lstStyle/>
-          <a:p>
-            <a:pPr algn="ctr"/>
-          </a:p>
-        </p:txBody>
-      </p:sp>
-      <p:sp>
-        <p:nvSpPr>
-          <p:cNvPr id="9" name="TextBox 8"/>
-          <p:cNvSpPr txBox="1"/>
-          <p:nvPr/>
-        </p:nvSpPr>
-        <p:spPr>
-          <a:xfrm>
-            <a:off x="8229600" y="1554480"/>
-            <a:ext cx="3474720" cy="274320"/>
-          </a:xfrm>
-          <a:prstGeom prst="rect">
-            <a:avLst/>
-          </a:prstGeom>
-          <a:noFill/>
-        </p:spPr>
-        <p:txBody>
-          <a:bodyPr wrap="none">
-            <a:spAutoFit/>
-          </a:bodyPr>
-          <a:lstStyle/>
-          <a:p>
-            <a:r>
-              <a:rPr sz="900" b="1">
-                <a:solidFill>
-                  <a:srgbClr val="5D6D7E"/>
-                </a:solidFill>
-                <a:latin typeface="Segoe UI"/>
-              </a:rPr>
-              <a:t>PRESENTER NOTES</a:t>
-            </a:r>
-          </a:p>
-        </p:txBody>
-      </p:sp>
-      <p:sp>
-        <p:nvSpPr>
-          <p:cNvPr id="10" name="TextBox 9"/>
-          <p:cNvSpPr txBox="1"/>
-          <p:nvPr/>
-        </p:nvSpPr>
-        <p:spPr>
-          <a:xfrm>
-            <a:off x="8229600" y="1828800"/>
-            <a:ext cx="3474720" cy="1463040"/>
-          </a:xfrm>
-          <a:prstGeom prst="rect">
-            <a:avLst/>
-          </a:prstGeom>
-          <a:noFill/>
-        </p:spPr>
-        <p:txBody>
-          <a:bodyPr wrap="square">
-            <a:spAutoFit/>
-          </a:bodyPr>
-          <a:lstStyle/>
+              <a:t>Focus: effective beginner workflows in VS Code</a:t>
+            </a:r>
+          </a:p>
           <a:p>
             <a:pPr>
+              <a:spcBef>
+                <a:spcPts val="400"/>
+              </a:spcBef>
               <a:spcAft>
-                <a:spcPts val="400"/>
+                <a:spcPts val="800"/>
               </a:spcAft>
             </a:pPr>
             <a:r>
-              <a:rPr sz="1100" i="1">
-                <a:solidFill>
-                  <a:srgbClr val="5D6D7E"/>
-                </a:solidFill>
-                <a:latin typeface="Segoe UI"/>
-              </a:rPr>
-              <a:t>This is the behavior baseline for the rest of the curriculum. The focus is not feature coverage. The focus is safe and repeatable use.</a:t>
-            </a:r>
-          </a:p>
-          <a:p>
-            <a:pPr>
-              <a:spcAft>
-                <a:spcPts val="400"/>
-              </a:spcAft>
-            </a:pPr>
-            <a:r>
-              <a:rPr sz="1100" i="1">
-                <a:solidFill>
-                  <a:srgbClr val="5D6D7E"/>
-                </a:solidFill>
-                <a:latin typeface="Segoe UI"/>
-              </a:rPr>
-              <a:t>Ask learners to name one task where faster output would be dangerous if it changed business meaning, experiment setup, or production operations.</a:t>
-            </a:r>
-          </a:p>
-        </p:txBody>
-      </p:sp>
-      <p:sp>
-        <p:nvSpPr>
-          <p:cNvPr id="11" name="Rectangle 10"/>
+              <a:rPr sz="1600">
+                <a:solidFill>
+                  <a:srgbClr val="0078D4"/>
+                </a:solidFill>
+                <a:latin typeface="Segoe UI"/>
+              </a:rPr>
+              <a:t>●  </a:t>
+            </a:r>
+            <a:r>
+              <a:rPr sz="1800">
+                <a:solidFill>
+                  <a:srgbClr val="2C3E50"/>
+                </a:solidFill>
+                <a:latin typeface="Segoe UI"/>
+              </a:rPr>
+              <a:t>Outcome: better prompts, better review, safer usage</a:t>
+            </a:r>
+          </a:p>
+        </p:txBody>
+      </p:sp>
+      <p:sp>
+        <p:nvSpPr>
+          <p:cNvPr id="8" name="Rectangle 7"/>
           <p:cNvSpPr/>
           <p:nvPr/>
         </p:nvSpPr>
@@ -9367,7 +8477,7 @@
                   <a:srgbClr val="FFFFFF"/>
                 </a:solidFill>
               </a:rPr>
-              <a:t>Beginner Best Practices For GitHub Copilot Agents In VS Code</a:t>
+              <a:t>Presenter Deck</a:t>
             </a:r>
           </a:p>
         </p:txBody>
@@ -9514,14 +8624,14 @@
                 </a:solidFill>
                 <a:latin typeface="Segoe UI"/>
               </a:rPr>
-              <a:t>Learning Objectives</a:t>
-            </a:r>
-          </a:p>
-        </p:txBody>
-      </p:sp>
-      <p:sp>
-        <p:nvSpPr>
-          <p:cNvPr id="5" name="Pentagon 4"/>
+              <a:t>Why Beginners Need A Method</a:t>
+            </a:r>
+          </a:p>
+        </p:txBody>
+      </p:sp>
+      <p:sp>
+        <p:nvSpPr>
+          <p:cNvPr id="5" name="Rounded Rectangle 4"/>
           <p:cNvSpPr/>
           <p:nvPr/>
         </p:nvSpPr>
@@ -9530,7 +8640,7 @@
             <a:off x="10972800" y="274320"/>
             <a:ext cx="548640" cy="548640"/>
           </a:xfrm>
-          <a:prstGeom prst="homePlate">
+          <a:prstGeom prst="roundRect">
             <a:avLst/>
           </a:prstGeom>
           <a:solidFill>
@@ -9606,7 +8716,7 @@
         <p:spPr>
           <a:xfrm>
             <a:off x="731520" y="1463040"/>
-            <a:ext cx="6858000" cy="4114800"/>
+            <a:ext cx="10515600" cy="4114800"/>
           </a:xfrm>
           <a:prstGeom prst="rect">
             <a:avLst/>
@@ -9643,7 +8753,7 @@
                 </a:solidFill>
                 <a:latin typeface="Segoe UI"/>
               </a:rPr>
-              <a:t>choose Ask, Plan, or Agent appropriately</a:t>
+              <a:t>Vague prompts lead to vague output</a:t>
             </a:r>
           </a:p>
           <a:p>
@@ -9671,7 +8781,7 @@
                 </a:solidFill>
                 <a:latin typeface="Segoe UI"/>
               </a:rPr>
-              <a:t>write more specific prompts</a:t>
+              <a:t>More autonomy increases review responsibility</a:t>
             </a:r>
           </a:p>
           <a:p>
@@ -9699,160 +8809,14 @@
                 </a:solidFill>
                 <a:latin typeface="Segoe UI"/>
               </a:rPr>
-              <a:t>review AI output before accepting it</a:t>
-            </a:r>
-          </a:p>
-          <a:p>
-            <a:pPr>
-              <a:spcBef>
-                <a:spcPts val="400"/>
-              </a:spcBef>
-              <a:spcAft>
-                <a:spcPts val="800"/>
-              </a:spcAft>
-            </a:pPr>
-            <a:r>
-              <a:rPr sz="1600">
-                <a:solidFill>
-                  <a:srgbClr val="0078D4"/>
-                </a:solidFill>
-                <a:latin typeface="Segoe UI"/>
-              </a:rPr>
-              <a:t>●  </a:t>
-            </a:r>
-            <a:r>
-              <a:rPr sz="1800">
-                <a:solidFill>
-                  <a:srgbClr val="2C3E50"/>
-                </a:solidFill>
-                <a:latin typeface="Segoe UI"/>
-              </a:rPr>
-              <a:t>understand basic guardrails and limits</a:t>
-            </a:r>
-          </a:p>
-        </p:txBody>
-      </p:sp>
-      <p:sp>
-        <p:nvSpPr>
-          <p:cNvPr id="8" name="Rounded Rectangle 7"/>
-          <p:cNvSpPr/>
-          <p:nvPr/>
-        </p:nvSpPr>
-        <p:spPr>
-          <a:xfrm>
-            <a:off x="8046720" y="1463040"/>
-            <a:ext cx="3840480" cy="1417320"/>
-          </a:xfrm>
-          <a:prstGeom prst="roundRect">
-            <a:avLst/>
-          </a:prstGeom>
-          <a:solidFill>
-            <a:srgbClr val="FDF2E9"/>
-          </a:solidFill>
-          <a:ln w="12700">
-            <a:solidFill>
-              <a:srgbClr val="E0C8A8"/>
-            </a:solidFill>
-          </a:ln>
-        </p:spPr>
-        <p:style>
-          <a:lnRef idx="1">
-            <a:schemeClr val="accent1"/>
-          </a:lnRef>
-          <a:fillRef idx="3">
-            <a:schemeClr val="accent1"/>
-          </a:fillRef>
-          <a:effectRef idx="2">
-            <a:schemeClr val="accent1"/>
-          </a:effectRef>
-          <a:fontRef idx="minor">
-            <a:schemeClr val="lt1"/>
-          </a:fontRef>
-        </p:style>
-        <p:txBody>
-          <a:bodyPr rtlCol="0" anchor="ctr"/>
-          <a:lstStyle/>
-          <a:p>
-            <a:pPr algn="ctr"/>
-          </a:p>
-        </p:txBody>
-      </p:sp>
-      <p:sp>
-        <p:nvSpPr>
-          <p:cNvPr id="9" name="TextBox 8"/>
-          <p:cNvSpPr txBox="1"/>
-          <p:nvPr/>
-        </p:nvSpPr>
-        <p:spPr>
-          <a:xfrm>
-            <a:off x="8229600" y="1554480"/>
-            <a:ext cx="3474720" cy="274320"/>
-          </a:xfrm>
-          <a:prstGeom prst="rect">
-            <a:avLst/>
-          </a:prstGeom>
-          <a:noFill/>
-        </p:spPr>
-        <p:txBody>
-          <a:bodyPr wrap="none">
-            <a:spAutoFit/>
-          </a:bodyPr>
-          <a:lstStyle/>
-          <a:p>
-            <a:r>
-              <a:rPr sz="900" b="1">
-                <a:solidFill>
-                  <a:srgbClr val="5D6D7E"/>
-                </a:solidFill>
-                <a:latin typeface="Segoe UI"/>
-              </a:rPr>
-              <a:t>PRESENTER NOTES</a:t>
-            </a:r>
-          </a:p>
-        </p:txBody>
-      </p:sp>
-      <p:sp>
-        <p:nvSpPr>
-          <p:cNvPr id="10" name="TextBox 9"/>
-          <p:cNvSpPr txBox="1"/>
-          <p:nvPr/>
-        </p:nvSpPr>
-        <p:spPr>
-          <a:xfrm>
-            <a:off x="8229600" y="1828800"/>
-            <a:ext cx="3474720" cy="960120"/>
-          </a:xfrm>
-          <a:prstGeom prst="rect">
-            <a:avLst/>
-          </a:prstGeom>
-          <a:noFill/>
-        </p:spPr>
-        <p:txBody>
-          <a:bodyPr wrap="square">
-            <a:spAutoFit/>
-          </a:bodyPr>
-          <a:lstStyle/>
-          <a:p>
-            <a:pPr>
-              <a:spcAft>
-                <a:spcPts val="400"/>
-              </a:spcAft>
-            </a:pPr>
-            <a:r>
-              <a:rPr sz="1100" i="1">
-                <a:solidFill>
-                  <a:srgbClr val="5D6D7E"/>
-                </a:solidFill>
-                <a:latin typeface="Segoe UI"/>
-              </a:rPr>
-              <a:t>Tell learners that these habits matter more than any single shortcut or feature.</a:t>
-            </a:r>
-          </a:p>
-        </p:txBody>
-      </p:sp>
-      <p:sp>
-        <p:nvSpPr>
-          <p:cNvPr id="11" name="Rectangle 10"/>
+              <a:t>Good habits reduce rework and confusion</a:t>
+            </a:r>
+          </a:p>
+        </p:txBody>
+      </p:sp>
+      <p:sp>
+        <p:nvSpPr>
+          <p:cNvPr id="8" name="Rectangle 7"/>
           <p:cNvSpPr/>
           <p:nvPr/>
         </p:nvSpPr>
@@ -9896,7 +8860,7 @@
                   <a:srgbClr val="FFFFFF"/>
                 </a:solidFill>
               </a:rPr>
-              <a:t>Beginner Best Practices For GitHub Copilot Agents In VS Code</a:t>
+              <a:t>Presenter Deck</a:t>
             </a:r>
           </a:p>
         </p:txBody>
@@ -10043,7 +9007,7 @@
                 </a:solidFill>
                 <a:latin typeface="Segoe UI"/>
               </a:rPr>
-              <a:t>Copilot Is An Assistant, Not An Authority</a:t>
+              <a:t>The Four Built-In Modes</a:t>
             </a:r>
           </a:p>
         </p:txBody>
@@ -10135,7 +9099,7 @@
         <p:spPr>
           <a:xfrm>
             <a:off x="731520" y="1463040"/>
-            <a:ext cx="6858000" cy="4114800"/>
+            <a:ext cx="10515600" cy="4114800"/>
           </a:xfrm>
           <a:prstGeom prst="rect">
             <a:avLst/>
@@ -10172,7 +9136,7 @@
                 </a:solidFill>
                 <a:latin typeface="Segoe UI"/>
               </a:rPr>
-              <a:t>strong drafting tool</a:t>
+              <a:t>Ask: explain and orient</a:t>
             </a:r>
           </a:p>
           <a:p>
@@ -10200,7 +9164,7 @@
                 </a:solidFill>
                 <a:latin typeface="Segoe UI"/>
               </a:rPr>
-              <a:t>not a replacement for human judgment</a:t>
+              <a:t>Edit: targeted inline changes with diff review</a:t>
             </a:r>
           </a:p>
           <a:p>
@@ -10228,132 +9192,42 @@
                 </a:solidFill>
                 <a:latin typeface="Segoe UI"/>
               </a:rPr>
-              <a:t>can be wrong, incomplete, or overconfident</a:t>
-            </a:r>
-          </a:p>
-        </p:txBody>
-      </p:sp>
-      <p:sp>
-        <p:nvSpPr>
-          <p:cNvPr id="8" name="Rounded Rectangle 7"/>
-          <p:cNvSpPr/>
-          <p:nvPr/>
-        </p:nvSpPr>
-        <p:spPr>
-          <a:xfrm>
-            <a:off x="8046720" y="1463040"/>
-            <a:ext cx="3840480" cy="1417320"/>
-          </a:xfrm>
-          <a:prstGeom prst="roundRect">
-            <a:avLst/>
-          </a:prstGeom>
-          <a:solidFill>
-            <a:srgbClr val="FDF2E9"/>
-          </a:solidFill>
-          <a:ln w="12700">
-            <a:solidFill>
-              <a:srgbClr val="E0C8A8"/>
-            </a:solidFill>
-          </a:ln>
-        </p:spPr>
-        <p:style>
-          <a:lnRef idx="1">
-            <a:schemeClr val="accent1"/>
-          </a:lnRef>
-          <a:fillRef idx="3">
-            <a:schemeClr val="accent1"/>
-          </a:fillRef>
-          <a:effectRef idx="2">
-            <a:schemeClr val="accent1"/>
-          </a:effectRef>
-          <a:fontRef idx="minor">
-            <a:schemeClr val="lt1"/>
-          </a:fontRef>
-        </p:style>
-        <p:txBody>
-          <a:bodyPr rtlCol="0" anchor="ctr"/>
-          <a:lstStyle/>
-          <a:p>
-            <a:pPr algn="ctr"/>
-          </a:p>
-        </p:txBody>
-      </p:sp>
-      <p:sp>
-        <p:nvSpPr>
-          <p:cNvPr id="9" name="TextBox 8"/>
-          <p:cNvSpPr txBox="1"/>
-          <p:nvPr/>
-        </p:nvSpPr>
-        <p:spPr>
-          <a:xfrm>
-            <a:off x="8229600" y="1554480"/>
-            <a:ext cx="3474720" cy="274320"/>
-          </a:xfrm>
-          <a:prstGeom prst="rect">
-            <a:avLst/>
-          </a:prstGeom>
-          <a:noFill/>
-        </p:spPr>
-        <p:txBody>
-          <a:bodyPr wrap="none">
-            <a:spAutoFit/>
-          </a:bodyPr>
-          <a:lstStyle/>
-          <a:p>
-            <a:r>
-              <a:rPr sz="900" b="1">
-                <a:solidFill>
-                  <a:srgbClr val="5D6D7E"/>
-                </a:solidFill>
-                <a:latin typeface="Segoe UI"/>
-              </a:rPr>
-              <a:t>PRESENTER NOTES</a:t>
-            </a:r>
-          </a:p>
-        </p:txBody>
-      </p:sp>
-      <p:sp>
-        <p:nvSpPr>
-          <p:cNvPr id="10" name="TextBox 9"/>
-          <p:cNvSpPr txBox="1"/>
-          <p:nvPr/>
-        </p:nvSpPr>
-        <p:spPr>
-          <a:xfrm>
-            <a:off x="8229600" y="1828800"/>
-            <a:ext cx="3474720" cy="960120"/>
-          </a:xfrm>
-          <a:prstGeom prst="rect">
-            <a:avLst/>
-          </a:prstGeom>
-          <a:noFill/>
-        </p:spPr>
-        <p:txBody>
-          <a:bodyPr wrap="square">
-            <a:spAutoFit/>
-          </a:bodyPr>
-          <a:lstStyle/>
+              <a:t>Plan: propose steps before changes</a:t>
+            </a:r>
+          </a:p>
           <a:p>
             <a:pPr>
+              <a:spcBef>
+                <a:spcPts val="400"/>
+              </a:spcBef>
               <a:spcAft>
-                <a:spcPts val="400"/>
+                <a:spcPts val="800"/>
               </a:spcAft>
             </a:pPr>
             <a:r>
-              <a:rPr sz="1100" i="1">
-                <a:solidFill>
-                  <a:srgbClr val="5D6D7E"/>
-                </a:solidFill>
-                <a:latin typeface="Segoe UI"/>
-              </a:rPr>
-              <a:t>Set the tone early: AI output is a draft, not a decision.</a:t>
-            </a:r>
-          </a:p>
-        </p:txBody>
-      </p:sp>
-      <p:sp>
-        <p:nvSpPr>
-          <p:cNvPr id="11" name="Rectangle 10"/>
+              <a:rPr sz="1600">
+                <a:solidFill>
+                  <a:srgbClr val="0078D4"/>
+                </a:solidFill>
+                <a:latin typeface="Segoe UI"/>
+              </a:rPr>
+              <a:t>●  </a:t>
+            </a:r>
+            <a:r>
+              <a:rPr sz="1800">
+                <a:solidFill>
+                  <a:srgbClr val="2C3E50"/>
+                </a:solidFill>
+                <a:latin typeface="Segoe UI"/>
+              </a:rPr>
+              <a:t>Agent: execute across files and tools</a:t>
+            </a:r>
+          </a:p>
+        </p:txBody>
+      </p:sp>
+      <p:sp>
+        <p:nvSpPr>
+          <p:cNvPr id="8" name="Rectangle 7"/>
           <p:cNvSpPr/>
           <p:nvPr/>
         </p:nvSpPr>
@@ -10397,7 +9271,7 @@
                   <a:srgbClr val="FFFFFF"/>
                 </a:solidFill>
               </a:rPr>
-              <a:t>Beginner Best Practices For GitHub Copilot Agents In VS Code</a:t>
+              <a:t>Presenter Deck</a:t>
             </a:r>
           </a:p>
         </p:txBody>
@@ -10544,7 +9418,7 @@
                 </a:solidFill>
                 <a:latin typeface="Segoe UI"/>
               </a:rPr>
-              <a:t>Safe Beginner Workflow</a:t>
+              <a:t>Choose The Lightest Tool That Works</a:t>
             </a:r>
           </a:p>
         </p:txBody>
@@ -10673,7 +9547,7 @@
                 </a:solidFill>
                 <a:latin typeface="Segoe UI"/>
               </a:rPr>
-              <a:t>Ask for orientation</a:t>
+              <a:t>Use Ask for understanding</a:t>
             </a:r>
           </a:p>
           <a:p>
@@ -10701,7 +9575,7 @@
                 </a:solidFill>
                 <a:latin typeface="Segoe UI"/>
               </a:rPr>
-              <a:t>Plan for multi-step work</a:t>
+              <a:t>Use Edit for targeted file changes</a:t>
             </a:r>
           </a:p>
           <a:p>
@@ -10729,7 +9603,7 @@
                 </a:solidFill>
                 <a:latin typeface="Segoe UI"/>
               </a:rPr>
-              <a:t>Agent for bounded execution</a:t>
+              <a:t>Use Plan for shaping work</a:t>
             </a:r>
           </a:p>
           <a:p>
@@ -10757,7 +9631,7 @@
                 </a:solidFill>
                 <a:latin typeface="Segoe UI"/>
               </a:rPr>
-              <a:t>review before accepting</a:t>
+              <a:t>Use Agent for clear, bounded execution</a:t>
             </a:r>
           </a:p>
         </p:txBody>
@@ -10771,7 +9645,7 @@
         <p:spPr>
           <a:xfrm>
             <a:off x="8046720" y="1463040"/>
-            <a:ext cx="3840480" cy="1417320"/>
+            <a:ext cx="3840480" cy="2926080"/>
           </a:xfrm>
           <a:prstGeom prst="roundRect">
             <a:avLst/>
@@ -10850,7 +9724,7 @@
         <p:spPr>
           <a:xfrm>
             <a:off x="8229600" y="1828800"/>
-            <a:ext cx="3474720" cy="960120"/>
+            <a:ext cx="3474720" cy="2468880"/>
           </a:xfrm>
           <a:prstGeom prst="rect">
             <a:avLst/>
@@ -10875,7 +9749,55 @@
                 </a:solidFill>
                 <a:latin typeface="Segoe UI"/>
               </a:rPr>
-              <a:t>This sequence should become the default mental model for beginners.</a:t>
+              <a:t>BI: Ask for an explanation of a reporting workflow.</a:t>
+            </a:r>
+          </a:p>
+          <a:p>
+            <a:pPr>
+              <a:spcAft>
+                <a:spcPts val="400"/>
+              </a:spcAft>
+            </a:pPr>
+            <a:r>
+              <a:rPr sz="1100" i="1">
+                <a:solidFill>
+                  <a:srgbClr val="5D6D7E"/>
+                </a:solidFill>
+                <a:latin typeface="Segoe UI"/>
+              </a:rPr>
+              <a:t>DS: Edit a notebook cell to add a missing seed parameter.</a:t>
+            </a:r>
+          </a:p>
+          <a:p>
+            <a:pPr>
+              <a:spcAft>
+                <a:spcPts val="400"/>
+              </a:spcAft>
+            </a:pPr>
+            <a:r>
+              <a:rPr sz="1100" i="1">
+                <a:solidFill>
+                  <a:srgbClr val="5D6D7E"/>
+                </a:solidFill>
+                <a:latin typeface="Segoe UI"/>
+              </a:rPr>
+              <a:t>DE: Plan a pipeline documentation improvement before any edits.</a:t>
+            </a:r>
+          </a:p>
+          <a:p>
+            <a:pPr>
+              <a:spcAft>
+                <a:spcPts val="400"/>
+              </a:spcAft>
+            </a:pPr>
+            <a:r>
+              <a:rPr sz="1100" i="1">
+                <a:solidFill>
+                  <a:srgbClr val="5D6D7E"/>
+                </a:solidFill>
+                <a:latin typeface="Segoe UI"/>
+              </a:rPr>
+              <a:t>DE: Agent can update a pipeline README after scope is agreed.</a:t>
             </a:r>
           </a:p>
         </p:txBody>
@@ -10926,7 +9848,7 @@
                   <a:srgbClr val="FFFFFF"/>
                 </a:solidFill>
               </a:rPr>
-              <a:t>Beginner Best Practices For GitHub Copilot Agents In VS Code</a:t>
+              <a:t>Presenter Deck</a:t>
             </a:r>
           </a:p>
         </p:txBody>
@@ -11073,7 +9995,7 @@
                 </a:solidFill>
                 <a:latin typeface="Segoe UI"/>
               </a:rPr>
-              <a:t>Strong Prompt Basics</a:t>
+              <a:t>What A Good Beginner Prompt Includes</a:t>
             </a:r>
           </a:p>
         </p:txBody>
@@ -11165,7 +10087,7 @@
         <p:spPr>
           <a:xfrm>
             <a:off x="731520" y="1463040"/>
-            <a:ext cx="6858000" cy="4114800"/>
+            <a:ext cx="10515600" cy="4114800"/>
           </a:xfrm>
           <a:prstGeom prst="rect">
             <a:avLst/>
@@ -11202,7 +10124,7 @@
                 </a:solidFill>
                 <a:latin typeface="Segoe UI"/>
               </a:rPr>
-              <a:t>clear goal</a:t>
+              <a:t>Goal</a:t>
             </a:r>
           </a:p>
           <a:p>
@@ -11230,7 +10152,7 @@
                 </a:solidFill>
                 <a:latin typeface="Segoe UI"/>
               </a:rPr>
-              <a:t>narrow scope</a:t>
+              <a:t>Scope</a:t>
             </a:r>
           </a:p>
           <a:p>
@@ -11258,7 +10180,7 @@
                 </a:solidFill>
                 <a:latin typeface="Segoe UI"/>
               </a:rPr>
-              <a:t>intended audience</a:t>
+              <a:t>Constraints</a:t>
             </a:r>
           </a:p>
           <a:p>
@@ -11286,7 +10208,7 @@
                 </a:solidFill>
                 <a:latin typeface="Segoe UI"/>
               </a:rPr>
-              <a:t>expected output</a:t>
+              <a:t>Expected output</a:t>
             </a:r>
           </a:p>
           <a:p>
@@ -11314,132 +10236,14 @@
                 </a:solidFill>
                 <a:latin typeface="Segoe UI"/>
               </a:rPr>
-              <a:t>validation step</a:t>
-            </a:r>
-          </a:p>
-        </p:txBody>
-      </p:sp>
-      <p:sp>
-        <p:nvSpPr>
-          <p:cNvPr id="8" name="Rounded Rectangle 7"/>
-          <p:cNvSpPr/>
-          <p:nvPr/>
-        </p:nvSpPr>
-        <p:spPr>
-          <a:xfrm>
-            <a:off x="8046720" y="1463040"/>
-            <a:ext cx="3840480" cy="1417320"/>
-          </a:xfrm>
-          <a:prstGeom prst="roundRect">
-            <a:avLst/>
-          </a:prstGeom>
-          <a:solidFill>
-            <a:srgbClr val="FDF2E9"/>
-          </a:solidFill>
-          <a:ln w="12700">
-            <a:solidFill>
-              <a:srgbClr val="E0C8A8"/>
-            </a:solidFill>
-          </a:ln>
-        </p:spPr>
-        <p:style>
-          <a:lnRef idx="1">
-            <a:schemeClr val="accent1"/>
-          </a:lnRef>
-          <a:fillRef idx="3">
-            <a:schemeClr val="accent1"/>
-          </a:fillRef>
-          <a:effectRef idx="2">
-            <a:schemeClr val="accent1"/>
-          </a:effectRef>
-          <a:fontRef idx="minor">
-            <a:schemeClr val="lt1"/>
-          </a:fontRef>
-        </p:style>
-        <p:txBody>
-          <a:bodyPr rtlCol="0" anchor="ctr"/>
-          <a:lstStyle/>
-          <a:p>
-            <a:pPr algn="ctr"/>
-          </a:p>
-        </p:txBody>
-      </p:sp>
-      <p:sp>
-        <p:nvSpPr>
-          <p:cNvPr id="9" name="TextBox 8"/>
-          <p:cNvSpPr txBox="1"/>
-          <p:nvPr/>
-        </p:nvSpPr>
-        <p:spPr>
-          <a:xfrm>
-            <a:off x="8229600" y="1554480"/>
-            <a:ext cx="3474720" cy="274320"/>
-          </a:xfrm>
-          <a:prstGeom prst="rect">
-            <a:avLst/>
-          </a:prstGeom>
-          <a:noFill/>
-        </p:spPr>
-        <p:txBody>
-          <a:bodyPr wrap="none">
-            <a:spAutoFit/>
-          </a:bodyPr>
-          <a:lstStyle/>
-          <a:p>
-            <a:r>
-              <a:rPr sz="900" b="1">
-                <a:solidFill>
-                  <a:srgbClr val="5D6D7E"/>
-                </a:solidFill>
-                <a:latin typeface="Segoe UI"/>
-              </a:rPr>
-              <a:t>PRESENTER NOTES</a:t>
-            </a:r>
-          </a:p>
-        </p:txBody>
-      </p:sp>
-      <p:sp>
-        <p:nvSpPr>
-          <p:cNvPr id="10" name="TextBox 9"/>
-          <p:cNvSpPr txBox="1"/>
-          <p:nvPr/>
-        </p:nvSpPr>
-        <p:spPr>
-          <a:xfrm>
-            <a:off x="8229600" y="1828800"/>
-            <a:ext cx="3474720" cy="960120"/>
-          </a:xfrm>
-          <a:prstGeom prst="rect">
-            <a:avLst/>
-          </a:prstGeom>
-          <a:noFill/>
-        </p:spPr>
-        <p:txBody>
-          <a:bodyPr wrap="square">
-            <a:spAutoFit/>
-          </a:bodyPr>
-          <a:lstStyle/>
-          <a:p>
-            <a:pPr>
-              <a:spcAft>
-                <a:spcPts val="400"/>
-              </a:spcAft>
-            </a:pPr>
-            <a:r>
-              <a:rPr sz="1100" i="1">
-                <a:solidFill>
-                  <a:srgbClr val="5D6D7E"/>
-                </a:solidFill>
-                <a:latin typeface="Segoe UI"/>
-              </a:rPr>
-              <a:t>This is the easiest reusable template learners can take back to work.</a:t>
-            </a:r>
-          </a:p>
-        </p:txBody>
-      </p:sp>
-      <p:sp>
-        <p:nvSpPr>
-          <p:cNvPr id="11" name="Rectangle 10"/>
+              <a:t>Relevant context</a:t>
+            </a:r>
+          </a:p>
+        </p:txBody>
+      </p:sp>
+      <p:sp>
+        <p:nvSpPr>
+          <p:cNvPr id="8" name="Rectangle 7"/>
           <p:cNvSpPr/>
           <p:nvPr/>
         </p:nvSpPr>
@@ -11483,7 +10287,7 @@
                   <a:srgbClr val="FFFFFF"/>
                 </a:solidFill>
               </a:rPr>
-              <a:t>Beginner Best Practices For GitHub Copilot Agents In VS Code</a:t>
+              <a:t>Presenter Deck</a:t>
             </a:r>
           </a:p>
         </p:txBody>
@@ -11630,7 +10434,7 @@
                 </a:solidFill>
                 <a:latin typeface="Segoe UI"/>
               </a:rPr>
-              <a:t>Give Better Context</a:t>
+              <a:t>Context Improves Quality</a:t>
             </a:r>
           </a:p>
         </p:txBody>
@@ -11722,7 +10526,7 @@
         <p:spPr>
           <a:xfrm>
             <a:off x="731520" y="1463040"/>
-            <a:ext cx="6858000" cy="4114800"/>
+            <a:ext cx="10515600" cy="4114800"/>
           </a:xfrm>
           <a:prstGeom prst="rect">
             <a:avLst/>
@@ -11759,7 +10563,7 @@
                 </a:solidFill>
                 <a:latin typeface="Segoe UI"/>
               </a:rPr>
-              <a:t>active file and selection</a:t>
+              <a:t>Active file and selection</a:t>
             </a:r>
           </a:p>
           <a:p>
@@ -11787,7 +10591,7 @@
                 </a:solidFill>
                 <a:latin typeface="Segoe UI"/>
               </a:rPr>
-              <a:t>`#file`</a:t>
+              <a:t>`#file`, `#folder`, `#codebase`</a:t>
             </a:r>
           </a:p>
           <a:p>
@@ -11815,7 +10619,7 @@
                 </a:solidFill>
                 <a:latin typeface="Segoe UI"/>
               </a:rPr>
-              <a:t>`#codebase`</a:t>
+              <a:t>`#fetch` for official docs</a:t>
             </a:r>
           </a:p>
           <a:p>
@@ -11843,132 +10647,14 @@
                 </a:solidFill>
                 <a:latin typeface="Segoe UI"/>
               </a:rPr>
-              <a:t>`#fetch`</a:t>
-            </a:r>
-          </a:p>
-        </p:txBody>
-      </p:sp>
-      <p:sp>
-        <p:nvSpPr>
-          <p:cNvPr id="8" name="Rounded Rectangle 7"/>
-          <p:cNvSpPr/>
-          <p:nvPr/>
-        </p:nvSpPr>
-        <p:spPr>
-          <a:xfrm>
-            <a:off x="8046720" y="1463040"/>
-            <a:ext cx="3840480" cy="1417320"/>
-          </a:xfrm>
-          <a:prstGeom prst="roundRect">
-            <a:avLst/>
-          </a:prstGeom>
-          <a:solidFill>
-            <a:srgbClr val="FDF2E9"/>
-          </a:solidFill>
-          <a:ln w="12700">
-            <a:solidFill>
-              <a:srgbClr val="E0C8A8"/>
-            </a:solidFill>
-          </a:ln>
-        </p:spPr>
-        <p:style>
-          <a:lnRef idx="1">
-            <a:schemeClr val="accent1"/>
-          </a:lnRef>
-          <a:fillRef idx="3">
-            <a:schemeClr val="accent1"/>
-          </a:fillRef>
-          <a:effectRef idx="2">
-            <a:schemeClr val="accent1"/>
-          </a:effectRef>
-          <a:fontRef idx="minor">
-            <a:schemeClr val="lt1"/>
-          </a:fontRef>
-        </p:style>
-        <p:txBody>
-          <a:bodyPr rtlCol="0" anchor="ctr"/>
-          <a:lstStyle/>
-          <a:p>
-            <a:pPr algn="ctr"/>
-          </a:p>
-        </p:txBody>
-      </p:sp>
-      <p:sp>
-        <p:nvSpPr>
-          <p:cNvPr id="9" name="TextBox 8"/>
-          <p:cNvSpPr txBox="1"/>
-          <p:nvPr/>
-        </p:nvSpPr>
-        <p:spPr>
-          <a:xfrm>
-            <a:off x="8229600" y="1554480"/>
-            <a:ext cx="3474720" cy="274320"/>
-          </a:xfrm>
-          <a:prstGeom prst="rect">
-            <a:avLst/>
-          </a:prstGeom>
-          <a:noFill/>
-        </p:spPr>
-        <p:txBody>
-          <a:bodyPr wrap="none">
-            <a:spAutoFit/>
-          </a:bodyPr>
-          <a:lstStyle/>
-          <a:p>
-            <a:r>
-              <a:rPr sz="900" b="1">
-                <a:solidFill>
-                  <a:srgbClr val="5D6D7E"/>
-                </a:solidFill>
-                <a:latin typeface="Segoe UI"/>
-              </a:rPr>
-              <a:t>PRESENTER NOTES</a:t>
-            </a:r>
-          </a:p>
-        </p:txBody>
-      </p:sp>
-      <p:sp>
-        <p:nvSpPr>
-          <p:cNvPr id="10" name="TextBox 9"/>
-          <p:cNvSpPr txBox="1"/>
-          <p:nvPr/>
-        </p:nvSpPr>
-        <p:spPr>
-          <a:xfrm>
-            <a:off x="8229600" y="1828800"/>
-            <a:ext cx="3474720" cy="960120"/>
-          </a:xfrm>
-          <a:prstGeom prst="rect">
-            <a:avLst/>
-          </a:prstGeom>
-          <a:noFill/>
-        </p:spPr>
-        <p:txBody>
-          <a:bodyPr wrap="square">
-            <a:spAutoFit/>
-          </a:bodyPr>
-          <a:lstStyle/>
-          <a:p>
-            <a:pPr>
-              <a:spcAft>
-                <a:spcPts val="400"/>
-              </a:spcAft>
-            </a:pPr>
-            <a:r>
-              <a:rPr sz="1100" i="1">
-                <a:solidFill>
-                  <a:srgbClr val="5D6D7E"/>
-                </a:solidFill>
-                <a:latin typeface="Segoe UI"/>
-              </a:rPr>
-              <a:t>Point out that weak context often looks like weak AI, even when the real issue is the prompt setup.</a:t>
-            </a:r>
-          </a:p>
-        </p:txBody>
-      </p:sp>
-      <p:sp>
-        <p:nvSpPr>
-          <p:cNvPr id="11" name="Rectangle 10"/>
+              <a:t>`@vscode` for product-specific questions</a:t>
+            </a:r>
+          </a:p>
+        </p:txBody>
+      </p:sp>
+      <p:sp>
+        <p:nvSpPr>
+          <p:cNvPr id="8" name="Rectangle 7"/>
           <p:cNvSpPr/>
           <p:nvPr/>
         </p:nvSpPr>
@@ -12012,7 +10698,7 @@
                   <a:srgbClr val="FFFFFF"/>
                 </a:solidFill>
               </a:rPr>
-              <a:t>Beginner Best Practices For GitHub Copilot Agents In VS Code</a:t>
+              <a:t>Presenter Deck</a:t>
             </a:r>
           </a:p>
         </p:txBody>
@@ -12031,7 +10717,7 @@
     <p:bg>
       <p:bgPr>
         <a:solidFill>
-          <a:srgbClr val="FFFFFF"/>
+          <a:srgbClr val="0078D4"/>
         </a:solidFill>
         <a:effectLst/>
       </p:bgPr>
@@ -12045,20 +10731,20 @@
       <p:grpSpPr/>
       <p:sp>
         <p:nvSpPr>
-          <p:cNvPr id="2" name="Rectangle 1"/>
+          <p:cNvPr id="2" name="Oval 1"/>
           <p:cNvSpPr/>
           <p:nvPr/>
         </p:nvSpPr>
         <p:spPr>
           <a:xfrm>
-            <a:off x="0" y="0"/>
-            <a:ext cx="12191695" cy="1097280"/>
-          </a:xfrm>
-          <a:prstGeom prst="rect">
+            <a:off x="-1828800" y="-1828800"/>
+            <a:ext cx="4572000" cy="4572000"/>
+          </a:xfrm>
+          <a:prstGeom prst="ellipse">
             <a:avLst/>
           </a:prstGeom>
           <a:solidFill>
-            <a:srgbClr val="0078D4"/>
+            <a:srgbClr val="006ABE"/>
           </a:solidFill>
           <a:ln>
             <a:noFill/>
@@ -12088,20 +10774,20 @@
       </p:sp>
       <p:sp>
         <p:nvSpPr>
-          <p:cNvPr id="3" name="Rectangle 2"/>
+          <p:cNvPr id="3" name="Oval 2"/>
           <p:cNvSpPr/>
           <p:nvPr/>
         </p:nvSpPr>
         <p:spPr>
           <a:xfrm>
-            <a:off x="0" y="0"/>
-            <a:ext cx="73152" cy="6858000"/>
-          </a:xfrm>
-          <a:prstGeom prst="rect">
+            <a:off x="9144000" y="3657600"/>
+            <a:ext cx="3657600" cy="3657600"/>
+          </a:xfrm>
+          <a:prstGeom prst="ellipse">
             <a:avLst/>
           </a:prstGeom>
           <a:solidFill>
-            <a:srgbClr val="0078D4"/>
+            <a:srgbClr val="006ABE"/>
           </a:solidFill>
           <a:ln>
             <a:noFill/>
@@ -12137,8 +10823,8 @@
         </p:nvSpPr>
         <p:spPr>
           <a:xfrm>
-            <a:off x="731520" y="228600"/>
-            <a:ext cx="9144000" cy="731520"/>
+            <a:off x="1828800" y="2286000"/>
+            <a:ext cx="8229600" cy="1371600"/>
           </a:xfrm>
           <a:prstGeom prst="rect">
             <a:avLst/>
@@ -12151,72 +10837,29 @@
           </a:bodyPr>
           <a:lstStyle/>
           <a:p>
-            <a:pPr algn="l"/>
-            <a:r>
-              <a:rPr sz="2800" b="1">
+            <a:pPr algn="ctr"/>
+            <a:r>
+              <a:rPr sz="3600" b="1">
                 <a:solidFill>
                   <a:srgbClr val="FFFFFF"/>
                 </a:solidFill>
                 <a:latin typeface="Segoe UI"/>
               </a:rPr>
-              <a:t>Common Beginner Mistakes</a:t>
-            </a:r>
-          </a:p>
-        </p:txBody>
-      </p:sp>
-      <p:sp>
-        <p:nvSpPr>
-          <p:cNvPr id="5" name="Rounded Rectangle 4"/>
-          <p:cNvSpPr/>
-          <p:nvPr/>
-        </p:nvSpPr>
-        <p:spPr>
-          <a:xfrm>
-            <a:off x="10972800" y="274320"/>
-            <a:ext cx="548640" cy="548640"/>
-          </a:xfrm>
-          <a:prstGeom prst="roundRect">
-            <a:avLst/>
-          </a:prstGeom>
-          <a:solidFill>
-            <a:srgbClr val="0078D4"/>
-          </a:solidFill>
-          <a:ln>
-            <a:noFill/>
-          </a:ln>
-        </p:spPr>
-        <p:style>
-          <a:lnRef idx="1">
-            <a:schemeClr val="accent1"/>
-          </a:lnRef>
-          <a:fillRef idx="3">
-            <a:schemeClr val="accent1"/>
-          </a:fillRef>
-          <a:effectRef idx="2">
-            <a:schemeClr val="accent1"/>
-          </a:effectRef>
-          <a:fontRef idx="minor">
-            <a:schemeClr val="lt1"/>
-          </a:fontRef>
-        </p:style>
-        <p:txBody>
-          <a:bodyPr rtlCol="0" anchor="ctr"/>
-          <a:lstStyle/>
-          <a:p>
-            <a:pPr algn="ctr"/>
-          </a:p>
-        </p:txBody>
-      </p:sp>
-      <p:sp>
-        <p:nvSpPr>
-          <p:cNvPr id="6" name="TextBox 5"/>
+              <a:t>Hands-On Lab</a:t>
+            </a:r>
+          </a:p>
+        </p:txBody>
+      </p:sp>
+      <p:sp>
+        <p:nvSpPr>
+          <p:cNvPr id="5" name="TextBox 4"/>
           <p:cNvSpPr txBox="1"/>
           <p:nvPr/>
         </p:nvSpPr>
         <p:spPr>
           <a:xfrm>
-            <a:off x="10789920" y="228600"/>
-            <a:ext cx="1097280" cy="365760"/>
+            <a:off x="1828800" y="3840480"/>
+            <a:ext cx="8229600" cy="731520"/>
           </a:xfrm>
           <a:prstGeom prst="rect">
             <a:avLst/>
@@ -12229,319 +10872,15 @@
           </a:bodyPr>
           <a:lstStyle/>
           <a:p>
-            <a:pPr algn="r"/>
-            <a:r>
-              <a:rPr sz="1200" b="0">
-                <a:solidFill>
-                  <a:srgbClr val="FFFFFF"/>
-                </a:solidFill>
-                <a:latin typeface="Segoe UI"/>
-              </a:rPr>
-              <a:t>7</a:t>
-            </a:r>
-          </a:p>
-        </p:txBody>
-      </p:sp>
-      <p:sp>
-        <p:nvSpPr>
-          <p:cNvPr id="7" name="TextBox 6"/>
-          <p:cNvSpPr txBox="1"/>
-          <p:nvPr/>
-        </p:nvSpPr>
-        <p:spPr>
-          <a:xfrm>
-            <a:off x="731520" y="1463040"/>
-            <a:ext cx="6858000" cy="4114800"/>
-          </a:xfrm>
-          <a:prstGeom prst="rect">
-            <a:avLst/>
-          </a:prstGeom>
-          <a:noFill/>
-        </p:spPr>
-        <p:txBody>
-          <a:bodyPr wrap="square">
-            <a:spAutoFit/>
-          </a:bodyPr>
-          <a:lstStyle/>
-          <a:p>
-            <a:pPr>
-              <a:spcBef>
-                <a:spcPts val="400"/>
-              </a:spcBef>
-              <a:spcAft>
-                <a:spcPts val="800"/>
-              </a:spcAft>
-            </a:pPr>
-            <a:r>
-              <a:rPr sz="1600">
-                <a:solidFill>
-                  <a:srgbClr val="0078D4"/>
-                </a:solidFill>
-                <a:latin typeface="Segoe UI"/>
-              </a:rPr>
-              <a:t>●  </a:t>
-            </a:r>
-            <a:r>
-              <a:rPr sz="1800">
-                <a:solidFill>
-                  <a:srgbClr val="2C3E50"/>
-                </a:solidFill>
-                <a:latin typeface="Segoe UI"/>
-              </a:rPr>
-              <a:t>asking for too much at once</a:t>
-            </a:r>
-          </a:p>
-          <a:p>
-            <a:pPr>
-              <a:spcBef>
-                <a:spcPts val="400"/>
-              </a:spcBef>
-              <a:spcAft>
-                <a:spcPts val="800"/>
-              </a:spcAft>
-            </a:pPr>
-            <a:r>
-              <a:rPr sz="1600">
-                <a:solidFill>
-                  <a:srgbClr val="0078D4"/>
-                </a:solidFill>
-                <a:latin typeface="Segoe UI"/>
-              </a:rPr>
-              <a:t>●  </a:t>
-            </a:r>
-            <a:r>
-              <a:rPr sz="1800">
-                <a:solidFill>
-                  <a:srgbClr val="2C3E50"/>
-                </a:solidFill>
-                <a:latin typeface="Segoe UI"/>
-              </a:rPr>
-              <a:t>starting with Agent too early</a:t>
-            </a:r>
-          </a:p>
-          <a:p>
-            <a:pPr>
-              <a:spcBef>
-                <a:spcPts val="400"/>
-              </a:spcBef>
-              <a:spcAft>
-                <a:spcPts val="800"/>
-              </a:spcAft>
-            </a:pPr>
-            <a:r>
-              <a:rPr sz="1600">
-                <a:solidFill>
-                  <a:srgbClr val="0078D4"/>
-                </a:solidFill>
-                <a:latin typeface="Segoe UI"/>
-              </a:rPr>
-              <a:t>●  </a:t>
-            </a:r>
-            <a:r>
-              <a:rPr sz="1800">
-                <a:solidFill>
-                  <a:srgbClr val="2C3E50"/>
-                </a:solidFill>
-                <a:latin typeface="Segoe UI"/>
-              </a:rPr>
-              <a:t>accepting plausible output without review</a:t>
-            </a:r>
-          </a:p>
-          <a:p>
-            <a:pPr>
-              <a:spcBef>
-                <a:spcPts val="400"/>
-              </a:spcBef>
-              <a:spcAft>
-                <a:spcPts val="800"/>
-              </a:spcAft>
-            </a:pPr>
-            <a:r>
-              <a:rPr sz="1600">
-                <a:solidFill>
-                  <a:srgbClr val="0078D4"/>
-                </a:solidFill>
-                <a:latin typeface="Segoe UI"/>
-              </a:rPr>
-              <a:t>●  </a:t>
-            </a:r>
-            <a:r>
-              <a:rPr sz="1800">
-                <a:solidFill>
-                  <a:srgbClr val="2C3E50"/>
-                </a:solidFill>
-                <a:latin typeface="Segoe UI"/>
-              </a:rPr>
-              <a:t>mixing unrelated tasks in one chat</a:t>
-            </a:r>
-          </a:p>
-        </p:txBody>
-      </p:sp>
-      <p:sp>
-        <p:nvSpPr>
-          <p:cNvPr id="8" name="Rounded Rectangle 7"/>
-          <p:cNvSpPr/>
-          <p:nvPr/>
-        </p:nvSpPr>
-        <p:spPr>
-          <a:xfrm>
-            <a:off x="8046720" y="1463040"/>
-            <a:ext cx="3840480" cy="1417320"/>
-          </a:xfrm>
-          <a:prstGeom prst="roundRect">
-            <a:avLst/>
-          </a:prstGeom>
-          <a:solidFill>
-            <a:srgbClr val="FDF2E9"/>
-          </a:solidFill>
-          <a:ln w="12700">
-            <a:solidFill>
-              <a:srgbClr val="E0C8A8"/>
-            </a:solidFill>
-          </a:ln>
-        </p:spPr>
-        <p:style>
-          <a:lnRef idx="1">
-            <a:schemeClr val="accent1"/>
-          </a:lnRef>
-          <a:fillRef idx="3">
-            <a:schemeClr val="accent1"/>
-          </a:fillRef>
-          <a:effectRef idx="2">
-            <a:schemeClr val="accent1"/>
-          </a:effectRef>
-          <a:fontRef idx="minor">
-            <a:schemeClr val="lt1"/>
-          </a:fontRef>
-        </p:style>
-        <p:txBody>
-          <a:bodyPr rtlCol="0" anchor="ctr"/>
-          <a:lstStyle/>
-          <a:p>
             <a:pPr algn="ctr"/>
-          </a:p>
-        </p:txBody>
-      </p:sp>
-      <p:sp>
-        <p:nvSpPr>
-          <p:cNvPr id="9" name="TextBox 8"/>
-          <p:cNvSpPr txBox="1"/>
-          <p:nvPr/>
-        </p:nvSpPr>
-        <p:spPr>
-          <a:xfrm>
-            <a:off x="8229600" y="1554480"/>
-            <a:ext cx="3474720" cy="274320"/>
-          </a:xfrm>
-          <a:prstGeom prst="rect">
-            <a:avLst/>
-          </a:prstGeom>
-          <a:noFill/>
-        </p:spPr>
-        <p:txBody>
-          <a:bodyPr wrap="none">
-            <a:spAutoFit/>
-          </a:bodyPr>
-          <a:lstStyle/>
-          <a:p>
-            <a:r>
-              <a:rPr sz="900" b="1">
-                <a:solidFill>
-                  <a:srgbClr val="5D6D7E"/>
-                </a:solidFill>
-                <a:latin typeface="Segoe UI"/>
-              </a:rPr>
-              <a:t>PRESENTER NOTES</a:t>
-            </a:r>
-          </a:p>
-        </p:txBody>
-      </p:sp>
-      <p:sp>
-        <p:nvSpPr>
-          <p:cNvPr id="10" name="TextBox 9"/>
-          <p:cNvSpPr txBox="1"/>
-          <p:nvPr/>
-        </p:nvSpPr>
-        <p:spPr>
-          <a:xfrm>
-            <a:off x="8229600" y="1828800"/>
-            <a:ext cx="3474720" cy="960120"/>
-          </a:xfrm>
-          <a:prstGeom prst="rect">
-            <a:avLst/>
-          </a:prstGeom>
-          <a:noFill/>
-        </p:spPr>
-        <p:txBody>
-          <a:bodyPr wrap="square">
-            <a:spAutoFit/>
-          </a:bodyPr>
-          <a:lstStyle/>
-          <a:p>
-            <a:pPr>
-              <a:spcAft>
-                <a:spcPts val="400"/>
-              </a:spcAft>
-            </a:pPr>
-            <a:r>
-              <a:rPr sz="1100" i="1">
-                <a:solidFill>
-                  <a:srgbClr val="5D6D7E"/>
-                </a:solidFill>
-                <a:latin typeface="Segoe UI"/>
-              </a:rPr>
-              <a:t>Encourage learners to recognize these as normal mistakes, not personal failures.</a:t>
-            </a:r>
-          </a:p>
-        </p:txBody>
-      </p:sp>
-      <p:sp>
-        <p:nvSpPr>
-          <p:cNvPr id="11" name="Rectangle 10"/>
-          <p:cNvSpPr/>
-          <p:nvPr/>
-        </p:nvSpPr>
-        <p:spPr>
-          <a:xfrm>
-            <a:off x="0" y="6446520"/>
-            <a:ext cx="12191695" cy="411480"/>
-          </a:xfrm>
-          <a:prstGeom prst="rect">
-            <a:avLst/>
-          </a:prstGeom>
-          <a:solidFill>
-            <a:srgbClr val="1B3A5C"/>
-          </a:solidFill>
-          <a:ln>
-            <a:noFill/>
-          </a:ln>
-        </p:spPr>
-        <p:style>
-          <a:lnRef idx="1">
-            <a:schemeClr val="accent1"/>
-          </a:lnRef>
-          <a:fillRef idx="3">
-            <a:schemeClr val="accent1"/>
-          </a:fillRef>
-          <a:effectRef idx="2">
-            <a:schemeClr val="accent1"/>
-          </a:effectRef>
-          <a:fontRef idx="minor">
-            <a:schemeClr val="lt1"/>
-          </a:fontRef>
-        </p:style>
-        <p:txBody>
-          <a:bodyPr rtlCol="0" anchor="ctr" wrap="square"/>
-          <a:lstStyle/>
-          <a:p>
-            <a:pPr algn="ctr"/>
-            <a:r>
-              <a:rPr sz="1000">
-                <a:solidFill>
-                  <a:srgbClr val="FFFFFF"/>
-                </a:solidFill>
-              </a:rPr>
-              <a:t>Beginner Best Practices For GitHub Copilot Agents In VS Code</a:t>
+            <a:r>
+              <a:rPr sz="1800" b="0">
+                <a:solidFill>
+                  <a:srgbClr val="D6EAF8"/>
+                </a:solidFill>
+                <a:latin typeface="Segoe UI"/>
+              </a:rPr>
+              <a:t>Time to practice</a:t>
             </a:r>
           </a:p>
         </p:txBody>
@@ -12688,14 +11027,14 @@
                 </a:solidFill>
                 <a:latin typeface="Segoe UI"/>
               </a:rPr>
-              <a:t>BI Example</a:t>
-            </a:r>
-          </a:p>
-        </p:txBody>
-      </p:sp>
-      <p:sp>
-        <p:nvSpPr>
-          <p:cNvPr id="5" name="Chevron 4"/>
+              <a:t>Demo Or Hands-On Moment</a:t>
+            </a:r>
+          </a:p>
+        </p:txBody>
+      </p:sp>
+      <p:sp>
+        <p:nvSpPr>
+          <p:cNvPr id="5" name="Process 4"/>
           <p:cNvSpPr/>
           <p:nvPr/>
         </p:nvSpPr>
@@ -12704,7 +11043,7 @@
             <a:off x="10972800" y="274320"/>
             <a:ext cx="548640" cy="548640"/>
           </a:xfrm>
-          <a:prstGeom prst="chevron">
+          <a:prstGeom prst="flowChartProcess">
             <a:avLst/>
           </a:prstGeom>
           <a:solidFill>
@@ -12766,7 +11105,7 @@
                 </a:solidFill>
                 <a:latin typeface="Segoe UI"/>
               </a:rPr>
-              <a:t>8</a:t>
+              <a:t>7</a:t>
             </a:r>
           </a:p>
         </p:txBody>
@@ -12780,7 +11119,7 @@
         <p:spPr>
           <a:xfrm>
             <a:off x="731520" y="1463040"/>
-            <a:ext cx="6858000" cy="4114800"/>
+            <a:ext cx="10515600" cy="4114800"/>
           </a:xfrm>
           <a:prstGeom prst="rect">
             <a:avLst/>
@@ -12817,7 +11156,7 @@
                 </a:solidFill>
                 <a:latin typeface="Segoe UI"/>
               </a:rPr>
-              <a:t>improve a sales KPI glossary safely</a:t>
+              <a:t>Weak prompt: `Make this training better`</a:t>
             </a:r>
           </a:p>
           <a:p>
@@ -12845,132 +11184,42 @@
                 </a:solidFill>
                 <a:latin typeface="Segoe UI"/>
               </a:rPr>
-              <a:t>preserve revenue, margin, and YTD definitions</a:t>
-            </a:r>
-          </a:p>
-        </p:txBody>
-      </p:sp>
-      <p:sp>
-        <p:nvSpPr>
-          <p:cNvPr id="8" name="Rounded Rectangle 7"/>
-          <p:cNvSpPr/>
-          <p:nvPr/>
-        </p:nvSpPr>
-        <p:spPr>
-          <a:xfrm>
-            <a:off x="8046720" y="1463040"/>
-            <a:ext cx="3840480" cy="1417320"/>
-          </a:xfrm>
-          <a:prstGeom prst="roundRect">
-            <a:avLst/>
-          </a:prstGeom>
-          <a:solidFill>
-            <a:srgbClr val="FDF2E9"/>
-          </a:solidFill>
-          <a:ln w="12700">
-            <a:solidFill>
-              <a:srgbClr val="E0C8A8"/>
-            </a:solidFill>
-          </a:ln>
-        </p:spPr>
-        <p:style>
-          <a:lnRef idx="1">
-            <a:schemeClr val="accent1"/>
-          </a:lnRef>
-          <a:fillRef idx="3">
-            <a:schemeClr val="accent1"/>
-          </a:fillRef>
-          <a:effectRef idx="2">
-            <a:schemeClr val="accent1"/>
-          </a:effectRef>
-          <a:fontRef idx="minor">
-            <a:schemeClr val="lt1"/>
-          </a:fontRef>
-        </p:style>
-        <p:txBody>
-          <a:bodyPr rtlCol="0" anchor="ctr"/>
-          <a:lstStyle/>
-          <a:p>
-            <a:pPr algn="ctr"/>
-          </a:p>
-        </p:txBody>
-      </p:sp>
-      <p:sp>
-        <p:nvSpPr>
-          <p:cNvPr id="9" name="TextBox 8"/>
-          <p:cNvSpPr txBox="1"/>
-          <p:nvPr/>
-        </p:nvSpPr>
-        <p:spPr>
-          <a:xfrm>
-            <a:off x="8229600" y="1554480"/>
-            <a:ext cx="3474720" cy="274320"/>
-          </a:xfrm>
-          <a:prstGeom prst="rect">
-            <a:avLst/>
-          </a:prstGeom>
-          <a:noFill/>
-        </p:spPr>
-        <p:txBody>
-          <a:bodyPr wrap="none">
-            <a:spAutoFit/>
-          </a:bodyPr>
-          <a:lstStyle/>
-          <a:p>
-            <a:r>
-              <a:rPr sz="900" b="1">
-                <a:solidFill>
-                  <a:srgbClr val="5D6D7E"/>
-                </a:solidFill>
-                <a:latin typeface="Segoe UI"/>
-              </a:rPr>
-              <a:t>PRESENTER NOTES</a:t>
-            </a:r>
-          </a:p>
-        </p:txBody>
-      </p:sp>
-      <p:sp>
-        <p:nvSpPr>
-          <p:cNvPr id="10" name="TextBox 9"/>
-          <p:cNvSpPr txBox="1"/>
-          <p:nvPr/>
-        </p:nvSpPr>
-        <p:spPr>
-          <a:xfrm>
-            <a:off x="8229600" y="1828800"/>
-            <a:ext cx="3474720" cy="960120"/>
-          </a:xfrm>
-          <a:prstGeom prst="rect">
-            <a:avLst/>
-          </a:prstGeom>
-          <a:noFill/>
-        </p:spPr>
-        <p:txBody>
-          <a:bodyPr wrap="square">
-            <a:spAutoFit/>
-          </a:bodyPr>
-          <a:lstStyle/>
+              <a:t>Better prompt: `Review #file and add a beginner validation checklist. Keep it Windows-first and change only this file.`</a:t>
+            </a:r>
+          </a:p>
           <a:p>
             <a:pPr>
+              <a:spcBef>
+                <a:spcPts val="400"/>
+              </a:spcBef>
               <a:spcAft>
-                <a:spcPts val="400"/>
+                <a:spcPts val="800"/>
               </a:spcAft>
             </a:pPr>
             <a:r>
-              <a:rPr sz="1100" i="1">
-                <a:solidFill>
-                  <a:srgbClr val="5D6D7E"/>
-                </a:solidFill>
-                <a:latin typeface="Segoe UI"/>
-              </a:rPr>
-              <a:t>Use a concrete example such as a sales dashboard glossary where terms like gross margin and net sales already have approved definitions.</a:t>
-            </a:r>
-          </a:p>
-        </p:txBody>
-      </p:sp>
-      <p:sp>
-        <p:nvSpPr>
-          <p:cNvPr id="11" name="Rectangle 10"/>
+              <a:rPr sz="1600">
+                <a:solidFill>
+                  <a:srgbClr val="2ECC71"/>
+                </a:solidFill>
+                <a:latin typeface="Segoe UI"/>
+              </a:rPr>
+              <a:t>●  </a:t>
+            </a:r>
+            <a:r>
+              <a:rPr sz="1800">
+                <a:solidFill>
+                  <a:srgbClr val="2C3E50"/>
+                </a:solidFill>
+                <a:latin typeface="Segoe UI"/>
+              </a:rPr>
+              <a:t>Result: smaller, reviewable output</a:t>
+            </a:r>
+          </a:p>
+        </p:txBody>
+      </p:sp>
+      <p:sp>
+        <p:nvSpPr>
+          <p:cNvPr id="8" name="Rectangle 7"/>
           <p:cNvSpPr/>
           <p:nvPr/>
         </p:nvSpPr>
@@ -13014,7 +11263,7 @@
                   <a:srgbClr val="FFFFFF"/>
                 </a:solidFill>
               </a:rPr>
-              <a:t>Beginner Best Practices For GitHub Copilot Agents In VS Code</a:t>
+              <a:t>Presenter Deck</a:t>
             </a:r>
           </a:p>
         </p:txBody>
